--- a/fy26/using-msfoundry-in-private-network/images/figures.pptx
+++ b/fy26/using-msfoundry-in-private-network/images/figures.pptx
@@ -8,6 +8,10 @@
     <p:sldId id="256" r:id="rId2"/>
     <p:sldId id="257" r:id="rId3"/>
     <p:sldId id="258" r:id="rId4"/>
+    <p:sldId id="260" r:id="rId5"/>
+    <p:sldId id="261" r:id="rId6"/>
+    <p:sldId id="262" r:id="rId7"/>
+    <p:sldId id="259" r:id="rId8"/>
   </p:sldIdLst>
   <p:sldSz cx="12192000" cy="6858000"/>
   <p:notesSz cx="6858000" cy="9144000"/>
@@ -106,6 +110,11 @@
       </a:defRPr>
     </a:lvl9pPr>
   </p:defaultTextStyle>
+  <p:extLst>
+    <p:ext uri="{EFAFB233-063F-42B5-8137-9DF3F51BA10A}">
+      <p15:sldGuideLst xmlns:p15="http://schemas.microsoft.com/office/powerpoint/2012/main"/>
+    </p:ext>
+  </p:extLst>
 </p:presentation>
 </file>
 
@@ -4489,6 +4498,66 @@
           <a:chExt cx="0" cy="0"/>
         </a:xfrm>
       </p:grpSpPr>
+      <p:pic>
+        <p:nvPicPr>
+          <p:cNvPr id="3" name="図 2">
+            <a:extLst>
+              <a:ext uri="{FF2B5EF4-FFF2-40B4-BE49-F238E27FC236}">
+                <a16:creationId xmlns:a16="http://schemas.microsoft.com/office/drawing/2014/main" id="{DF7DC2CC-DD74-BA59-C191-AE18326E24AD}"/>
+              </a:ext>
+            </a:extLst>
+          </p:cNvPr>
+          <p:cNvPicPr>
+            <a:picLocks noChangeAspect="1"/>
+          </p:cNvPicPr>
+          <p:nvPr/>
+        </p:nvPicPr>
+        <p:blipFill>
+          <a:blip r:embed="rId2"/>
+          <a:stretch>
+            <a:fillRect/>
+          </a:stretch>
+        </p:blipFill>
+        <p:spPr>
+          <a:xfrm>
+            <a:off x="777091" y="661543"/>
+            <a:ext cx="3364098" cy="2104530"/>
+          </a:xfrm>
+          <a:prstGeom prst="rect">
+            <a:avLst/>
+          </a:prstGeom>
+        </p:spPr>
+      </p:pic>
+      <p:pic>
+        <p:nvPicPr>
+          <p:cNvPr id="5" name="図 4">
+            <a:extLst>
+              <a:ext uri="{FF2B5EF4-FFF2-40B4-BE49-F238E27FC236}">
+                <a16:creationId xmlns:a16="http://schemas.microsoft.com/office/drawing/2014/main" id="{5D563C1F-CAEE-E4FB-2D92-50A25EE496C2}"/>
+              </a:ext>
+            </a:extLst>
+          </p:cNvPr>
+          <p:cNvPicPr>
+            <a:picLocks noChangeAspect="1"/>
+          </p:cNvPicPr>
+          <p:nvPr/>
+        </p:nvPicPr>
+        <p:blipFill>
+          <a:blip r:embed="rId3"/>
+          <a:stretch>
+            <a:fillRect/>
+          </a:stretch>
+        </p:blipFill>
+        <p:spPr>
+          <a:xfrm>
+            <a:off x="4389877" y="661543"/>
+            <a:ext cx="7570273" cy="3254686"/>
+          </a:xfrm>
+          <a:prstGeom prst="rect">
+            <a:avLst/>
+          </a:prstGeom>
+        </p:spPr>
+      </p:pic>
     </p:spTree>
     <p:extLst>
       <p:ext uri="{BB962C8B-B14F-4D97-AF65-F5344CB8AC3E}">
@@ -4519,10 +4588,2723 @@
           <a:chExt cx="0" cy="0"/>
         </a:xfrm>
       </p:grpSpPr>
+      <p:pic>
+        <p:nvPicPr>
+          <p:cNvPr id="3" name="図 2">
+            <a:extLst>
+              <a:ext uri="{FF2B5EF4-FFF2-40B4-BE49-F238E27FC236}">
+                <a16:creationId xmlns:a16="http://schemas.microsoft.com/office/drawing/2014/main" id="{45BF5074-BAA5-D850-DA43-E622CAD07802}"/>
+              </a:ext>
+            </a:extLst>
+          </p:cNvPr>
+          <p:cNvPicPr>
+            <a:picLocks noChangeAspect="1"/>
+          </p:cNvPicPr>
+          <p:nvPr/>
+        </p:nvPicPr>
+        <p:blipFill>
+          <a:blip r:embed="rId2"/>
+          <a:stretch>
+            <a:fillRect/>
+          </a:stretch>
+        </p:blipFill>
+        <p:spPr>
+          <a:xfrm>
+            <a:off x="418713" y="315481"/>
+            <a:ext cx="10076033" cy="2731278"/>
+          </a:xfrm>
+          <a:prstGeom prst="rect">
+            <a:avLst/>
+          </a:prstGeom>
+        </p:spPr>
+      </p:pic>
     </p:spTree>
     <p:extLst>
       <p:ext uri="{BB962C8B-B14F-4D97-AF65-F5344CB8AC3E}">
         <p14:creationId xmlns:p14="http://schemas.microsoft.com/office/powerpoint/2010/main" val="2234607038"/>
+      </p:ext>
+    </p:extLst>
+  </p:cSld>
+  <p:clrMapOvr>
+    <a:masterClrMapping/>
+  </p:clrMapOvr>
+</p:sld>
+</file>
+
+<file path=ppt/slides/slide4.xml><?xml version="1.0" encoding="utf-8"?>
+<p:sld xmlns:a="http://schemas.openxmlformats.org/drawingml/2006/main" xmlns:r="http://schemas.openxmlformats.org/officeDocument/2006/relationships" xmlns:p="http://schemas.openxmlformats.org/presentationml/2006/main">
+  <p:cSld>
+    <p:spTree>
+      <p:nvGrpSpPr>
+        <p:cNvPr id="1" name="">
+          <a:extLst>
+            <a:ext uri="{FF2B5EF4-FFF2-40B4-BE49-F238E27FC236}">
+              <a16:creationId xmlns:a16="http://schemas.microsoft.com/office/drawing/2014/main" id="{E7B78D49-A896-77C8-9218-FF927740E4A5}"/>
+            </a:ext>
+          </a:extLst>
+        </p:cNvPr>
+        <p:cNvGrpSpPr/>
+        <p:nvPr/>
+      </p:nvGrpSpPr>
+      <p:grpSpPr>
+        <a:xfrm>
+          <a:off x="0" y="0"/>
+          <a:ext cx="0" cy="0"/>
+          <a:chOff x="0" y="0"/>
+          <a:chExt cx="0" cy="0"/>
+        </a:xfrm>
+      </p:grpSpPr>
+      <p:sp>
+        <p:nvSpPr>
+          <p:cNvPr id="41" name="正方形/長方形 40">
+            <a:extLst>
+              <a:ext uri="{FF2B5EF4-FFF2-40B4-BE49-F238E27FC236}">
+                <a16:creationId xmlns:a16="http://schemas.microsoft.com/office/drawing/2014/main" id="{2167AE1B-FDE6-2E4A-A370-1F666EE9B5D5}"/>
+              </a:ext>
+            </a:extLst>
+          </p:cNvPr>
+          <p:cNvSpPr/>
+          <p:nvPr/>
+        </p:nvSpPr>
+        <p:spPr>
+          <a:xfrm>
+            <a:off x="1148176" y="1231583"/>
+            <a:ext cx="9266519" cy="3602324"/>
+          </a:xfrm>
+          <a:prstGeom prst="rect">
+            <a:avLst/>
+          </a:prstGeom>
+          <a:solidFill>
+            <a:schemeClr val="bg1"/>
+          </a:solidFill>
+          <a:ln>
+            <a:noFill/>
+          </a:ln>
+          <a:effectLst>
+            <a:outerShdw blurRad="50800" dist="38100" dir="2700000" algn="tl" rotWithShape="0">
+              <a:prstClr val="black">
+                <a:alpha val="40000"/>
+              </a:prstClr>
+            </a:outerShdw>
+          </a:effectLst>
+        </p:spPr>
+        <p:style>
+          <a:lnRef idx="2">
+            <a:schemeClr val="accent1">
+              <a:shade val="15000"/>
+            </a:schemeClr>
+          </a:lnRef>
+          <a:fillRef idx="1">
+            <a:schemeClr val="accent1"/>
+          </a:fillRef>
+          <a:effectRef idx="0">
+            <a:schemeClr val="accent1"/>
+          </a:effectRef>
+          <a:fontRef idx="minor">
+            <a:schemeClr val="lt1"/>
+          </a:fontRef>
+        </p:style>
+        <p:txBody>
+          <a:bodyPr rtlCol="0" anchor="ctr"/>
+          <a:lstStyle/>
+          <a:p>
+            <a:pPr algn="ctr"/>
+            <a:endParaRPr kumimoji="1" lang="ja-JP" altLang="en-US" dirty="0"/>
+          </a:p>
+        </p:txBody>
+      </p:sp>
+      <p:sp>
+        <p:nvSpPr>
+          <p:cNvPr id="4" name="四角形: 角を丸くする 3">
+            <a:extLst>
+              <a:ext uri="{FF2B5EF4-FFF2-40B4-BE49-F238E27FC236}">
+                <a16:creationId xmlns:a16="http://schemas.microsoft.com/office/drawing/2014/main" id="{5F59E676-353A-18FA-7269-B0B3E880C107}"/>
+              </a:ext>
+            </a:extLst>
+          </p:cNvPr>
+          <p:cNvSpPr/>
+          <p:nvPr/>
+        </p:nvSpPr>
+        <p:spPr>
+          <a:xfrm>
+            <a:off x="2109127" y="2995165"/>
+            <a:ext cx="7109309" cy="1613070"/>
+          </a:xfrm>
+          <a:prstGeom prst="roundRect">
+            <a:avLst>
+              <a:gd name="adj" fmla="val 10513"/>
+            </a:avLst>
+          </a:prstGeom>
+          <a:noFill/>
+        </p:spPr>
+        <p:style>
+          <a:lnRef idx="2">
+            <a:schemeClr val="accent1"/>
+          </a:lnRef>
+          <a:fillRef idx="1">
+            <a:schemeClr val="lt1"/>
+          </a:fillRef>
+          <a:effectRef idx="0">
+            <a:schemeClr val="accent1"/>
+          </a:effectRef>
+          <a:fontRef idx="minor">
+            <a:schemeClr val="dk1"/>
+          </a:fontRef>
+        </p:style>
+        <p:txBody>
+          <a:bodyPr rtlCol="0" anchor="ctr"/>
+          <a:lstStyle/>
+          <a:p>
+            <a:pPr algn="ctr"/>
+            <a:endParaRPr kumimoji="1" lang="ja-JP" altLang="en-US"/>
+          </a:p>
+        </p:txBody>
+      </p:sp>
+      <p:pic>
+        <p:nvPicPr>
+          <p:cNvPr id="6" name="グラフィックス 5">
+            <a:extLst>
+              <a:ext uri="{FF2B5EF4-FFF2-40B4-BE49-F238E27FC236}">
+                <a16:creationId xmlns:a16="http://schemas.microsoft.com/office/drawing/2014/main" id="{FC5D29E3-76CC-0A64-8F59-4469DC870F0A}"/>
+              </a:ext>
+            </a:extLst>
+          </p:cNvPr>
+          <p:cNvPicPr>
+            <a:picLocks noChangeAspect="1"/>
+          </p:cNvPicPr>
+          <p:nvPr/>
+        </p:nvPicPr>
+        <p:blipFill>
+          <a:blip>
+            <a:extLst>
+              <a:ext uri="{96DAC541-7B7A-43D3-8B79-37D633B846F1}">
+                <asvg:svgBlip xmlns:asvg="http://schemas.microsoft.com/office/drawing/2016/SVG/main" r:embed="rId2"/>
+              </a:ext>
+            </a:extLst>
+          </a:blip>
+          <a:stretch>
+            <a:fillRect/>
+          </a:stretch>
+        </p:blipFill>
+        <p:spPr>
+          <a:xfrm>
+            <a:off x="3935907" y="3522524"/>
+            <a:ext cx="489169" cy="489169"/>
+          </a:xfrm>
+          <a:prstGeom prst="rect">
+            <a:avLst/>
+          </a:prstGeom>
+        </p:spPr>
+      </p:pic>
+      <p:sp>
+        <p:nvSpPr>
+          <p:cNvPr id="7" name="テキスト ボックス 6">
+            <a:extLst>
+              <a:ext uri="{FF2B5EF4-FFF2-40B4-BE49-F238E27FC236}">
+                <a16:creationId xmlns:a16="http://schemas.microsoft.com/office/drawing/2014/main" id="{4918A8D8-1F8F-CC8D-573C-8BC1AC119A12}"/>
+              </a:ext>
+            </a:extLst>
+          </p:cNvPr>
+          <p:cNvSpPr txBox="1"/>
+          <p:nvPr/>
+        </p:nvSpPr>
+        <p:spPr>
+          <a:xfrm>
+            <a:off x="3967933" y="4081471"/>
+            <a:ext cx="425116" cy="307777"/>
+          </a:xfrm>
+          <a:prstGeom prst="rect">
+            <a:avLst/>
+          </a:prstGeom>
+          <a:noFill/>
+        </p:spPr>
+        <p:txBody>
+          <a:bodyPr wrap="none" rtlCol="0">
+            <a:spAutoFit/>
+          </a:bodyPr>
+          <a:lstStyle/>
+          <a:p>
+            <a:r>
+              <a:rPr kumimoji="1" lang="en-US" altLang="ja-JP" sz="1400" dirty="0"/>
+              <a:t>PC</a:t>
+            </a:r>
+            <a:endParaRPr kumimoji="1" lang="ja-JP" altLang="en-US" sz="1400" dirty="0"/>
+          </a:p>
+        </p:txBody>
+      </p:sp>
+      <p:pic>
+        <p:nvPicPr>
+          <p:cNvPr id="13" name="グラフィックス 12">
+            <a:extLst>
+              <a:ext uri="{FF2B5EF4-FFF2-40B4-BE49-F238E27FC236}">
+                <a16:creationId xmlns:a16="http://schemas.microsoft.com/office/drawing/2014/main" id="{E18D3060-B7E5-A095-075E-ADD9A51C538E}"/>
+              </a:ext>
+            </a:extLst>
+          </p:cNvPr>
+          <p:cNvPicPr>
+            <a:picLocks noChangeAspect="1"/>
+          </p:cNvPicPr>
+          <p:nvPr/>
+        </p:nvPicPr>
+        <p:blipFill>
+          <a:blip>
+            <a:extLst>
+              <a:ext uri="{96DAC541-7B7A-43D3-8B79-37D633B846F1}">
+                <asvg:svgBlip xmlns:asvg="http://schemas.microsoft.com/office/drawing/2016/SVG/main" r:embed="rId3"/>
+              </a:ext>
+            </a:extLst>
+          </a:blip>
+          <a:stretch>
+            <a:fillRect/>
+          </a:stretch>
+        </p:blipFill>
+        <p:spPr>
+          <a:xfrm>
+            <a:off x="2217816" y="3048464"/>
+            <a:ext cx="404272" cy="404272"/>
+          </a:xfrm>
+          <a:prstGeom prst="rect">
+            <a:avLst/>
+          </a:prstGeom>
+        </p:spPr>
+      </p:pic>
+      <p:sp>
+        <p:nvSpPr>
+          <p:cNvPr id="15" name="テキスト ボックス 14">
+            <a:extLst>
+              <a:ext uri="{FF2B5EF4-FFF2-40B4-BE49-F238E27FC236}">
+                <a16:creationId xmlns:a16="http://schemas.microsoft.com/office/drawing/2014/main" id="{CD8A19E4-3AC6-DC16-56A5-79E579874326}"/>
+              </a:ext>
+            </a:extLst>
+          </p:cNvPr>
+          <p:cNvSpPr txBox="1"/>
+          <p:nvPr/>
+        </p:nvSpPr>
+        <p:spPr>
+          <a:xfrm>
+            <a:off x="2187532" y="3467159"/>
+            <a:ext cx="1620957" cy="307777"/>
+          </a:xfrm>
+          <a:prstGeom prst="rect">
+            <a:avLst/>
+          </a:prstGeom>
+          <a:noFill/>
+        </p:spPr>
+        <p:txBody>
+          <a:bodyPr wrap="none" rtlCol="0">
+            <a:spAutoFit/>
+          </a:bodyPr>
+          <a:lstStyle/>
+          <a:p>
+            <a:r>
+              <a:rPr lang="ja-JP" altLang="en-US" sz="1400" dirty="0"/>
+              <a:t>企業ネットワーク</a:t>
+            </a:r>
+            <a:endParaRPr kumimoji="1" lang="ja-JP" altLang="en-US" sz="1400" dirty="0"/>
+          </a:p>
+        </p:txBody>
+      </p:sp>
+      <p:cxnSp>
+        <p:nvCxnSpPr>
+          <p:cNvPr id="22" name="直線矢印コネクタ 21">
+            <a:extLst>
+              <a:ext uri="{FF2B5EF4-FFF2-40B4-BE49-F238E27FC236}">
+                <a16:creationId xmlns:a16="http://schemas.microsoft.com/office/drawing/2014/main" id="{D97C5B97-3FCC-2FDF-B445-60C43B0401F1}"/>
+              </a:ext>
+            </a:extLst>
+          </p:cNvPr>
+          <p:cNvCxnSpPr/>
+          <p:nvPr/>
+        </p:nvCxnSpPr>
+        <p:spPr>
+          <a:xfrm>
+            <a:off x="4625442" y="3801700"/>
+            <a:ext cx="3227241" cy="0"/>
+          </a:xfrm>
+          <a:prstGeom prst="straightConnector1">
+            <a:avLst/>
+          </a:prstGeom>
+          <a:ln>
+            <a:headEnd type="none" w="med" len="med"/>
+            <a:tailEnd type="arrow" w="med" len="med"/>
+          </a:ln>
+        </p:spPr>
+        <p:style>
+          <a:lnRef idx="2">
+            <a:schemeClr val="accent3"/>
+          </a:lnRef>
+          <a:fillRef idx="0">
+            <a:schemeClr val="accent3"/>
+          </a:fillRef>
+          <a:effectRef idx="1">
+            <a:schemeClr val="accent3"/>
+          </a:effectRef>
+          <a:fontRef idx="minor">
+            <a:schemeClr val="tx1"/>
+          </a:fontRef>
+        </p:style>
+      </p:cxnSp>
+      <p:sp>
+        <p:nvSpPr>
+          <p:cNvPr id="30" name="テキスト ボックス 29">
+            <a:extLst>
+              <a:ext uri="{FF2B5EF4-FFF2-40B4-BE49-F238E27FC236}">
+                <a16:creationId xmlns:a16="http://schemas.microsoft.com/office/drawing/2014/main" id="{CC8792D7-7158-CE5C-692E-A333D54F8943}"/>
+              </a:ext>
+            </a:extLst>
+          </p:cNvPr>
+          <p:cNvSpPr txBox="1"/>
+          <p:nvPr/>
+        </p:nvSpPr>
+        <p:spPr>
+          <a:xfrm>
+            <a:off x="5187347" y="3275293"/>
+            <a:ext cx="1313180" cy="523220"/>
+          </a:xfrm>
+          <a:prstGeom prst="rect">
+            <a:avLst/>
+          </a:prstGeom>
+          <a:noFill/>
+        </p:spPr>
+        <p:txBody>
+          <a:bodyPr wrap="none" rtlCol="0">
+            <a:spAutoFit/>
+          </a:bodyPr>
+          <a:lstStyle/>
+          <a:p>
+            <a:r>
+              <a:rPr kumimoji="1" lang="en-US" altLang="ja-JP" sz="1400" dirty="0"/>
+              <a:t>JavaScript</a:t>
+            </a:r>
+            <a:r>
+              <a:rPr kumimoji="1" lang="ja-JP" altLang="en-US" sz="1400" dirty="0"/>
+              <a:t> や </a:t>
+            </a:r>
+            <a:br>
+              <a:rPr kumimoji="1" lang="en-US" altLang="ja-JP" sz="1400" dirty="0"/>
+            </a:br>
+            <a:r>
+              <a:rPr kumimoji="1" lang="en-US" altLang="ja-JP" sz="1400" dirty="0" err="1"/>
+              <a:t>iframe</a:t>
+            </a:r>
+            <a:r>
+              <a:rPr lang="en-US" altLang="ja-JP" sz="1400" dirty="0"/>
+              <a:t> </a:t>
+            </a:r>
+            <a:r>
+              <a:rPr lang="ja-JP" altLang="en-US" sz="1400" dirty="0"/>
+              <a:t>から</a:t>
+            </a:r>
+            <a:endParaRPr kumimoji="1" lang="en-US" altLang="ja-JP" sz="1400" dirty="0"/>
+          </a:p>
+        </p:txBody>
+      </p:sp>
+      <p:pic>
+        <p:nvPicPr>
+          <p:cNvPr id="36" name="図 35">
+            <a:extLst>
+              <a:ext uri="{FF2B5EF4-FFF2-40B4-BE49-F238E27FC236}">
+                <a16:creationId xmlns:a16="http://schemas.microsoft.com/office/drawing/2014/main" id="{21A1CDAE-6AA8-23AB-C4F6-81E537E43CAF}"/>
+              </a:ext>
+            </a:extLst>
+          </p:cNvPr>
+          <p:cNvPicPr>
+            <a:picLocks noChangeAspect="1"/>
+          </p:cNvPicPr>
+          <p:nvPr/>
+        </p:nvPicPr>
+        <p:blipFill>
+          <a:blip r:embed="rId4">
+            <a:extLst>
+              <a:ext uri="{28A0092B-C50C-407E-A947-70E740481C1C}">
+                <a14:useLocalDpi xmlns:a14="http://schemas.microsoft.com/office/drawing/2010/main" val="0"/>
+              </a:ext>
+            </a:extLst>
+          </a:blip>
+          <a:stretch>
+            <a:fillRect/>
+          </a:stretch>
+        </p:blipFill>
+        <p:spPr>
+          <a:xfrm>
+            <a:off x="3860084" y="1409961"/>
+            <a:ext cx="640814" cy="653892"/>
+          </a:xfrm>
+          <a:prstGeom prst="rect">
+            <a:avLst/>
+          </a:prstGeom>
+        </p:spPr>
+      </p:pic>
+      <p:cxnSp>
+        <p:nvCxnSpPr>
+          <p:cNvPr id="37" name="直線矢印コネクタ 36">
+            <a:extLst>
+              <a:ext uri="{FF2B5EF4-FFF2-40B4-BE49-F238E27FC236}">
+                <a16:creationId xmlns:a16="http://schemas.microsoft.com/office/drawing/2014/main" id="{D4177D0D-773E-1267-ED6B-BBBC74679576}"/>
+              </a:ext>
+            </a:extLst>
+          </p:cNvPr>
+          <p:cNvCxnSpPr>
+            <a:cxnSpLocks/>
+          </p:cNvCxnSpPr>
+          <p:nvPr/>
+        </p:nvCxnSpPr>
+        <p:spPr>
+          <a:xfrm flipV="1">
+            <a:off x="4180541" y="2142880"/>
+            <a:ext cx="1732" cy="1248811"/>
+          </a:xfrm>
+          <a:prstGeom prst="straightConnector1">
+            <a:avLst/>
+          </a:prstGeom>
+          <a:ln>
+            <a:solidFill>
+              <a:schemeClr val="accent2"/>
+            </a:solidFill>
+            <a:headEnd type="none" w="med" len="med"/>
+            <a:tailEnd type="arrow" w="med" len="med"/>
+          </a:ln>
+        </p:spPr>
+        <p:style>
+          <a:lnRef idx="2">
+            <a:schemeClr val="accent3"/>
+          </a:lnRef>
+          <a:fillRef idx="0">
+            <a:schemeClr val="accent3"/>
+          </a:fillRef>
+          <a:effectRef idx="1">
+            <a:schemeClr val="accent3"/>
+          </a:effectRef>
+          <a:fontRef idx="minor">
+            <a:schemeClr val="tx1"/>
+          </a:fontRef>
+        </p:style>
+      </p:cxnSp>
+      <p:sp>
+        <p:nvSpPr>
+          <p:cNvPr id="40" name="テキスト ボックス 39">
+            <a:extLst>
+              <a:ext uri="{FF2B5EF4-FFF2-40B4-BE49-F238E27FC236}">
+                <a16:creationId xmlns:a16="http://schemas.microsoft.com/office/drawing/2014/main" id="{F4D9F2E2-FD3C-C65C-56BD-27D54A38367E}"/>
+              </a:ext>
+            </a:extLst>
+          </p:cNvPr>
+          <p:cNvSpPr txBox="1"/>
+          <p:nvPr/>
+        </p:nvSpPr>
+        <p:spPr>
+          <a:xfrm>
+            <a:off x="4500898" y="1634983"/>
+            <a:ext cx="1441420" cy="307777"/>
+          </a:xfrm>
+          <a:prstGeom prst="rect">
+            <a:avLst/>
+          </a:prstGeom>
+          <a:noFill/>
+        </p:spPr>
+        <p:txBody>
+          <a:bodyPr wrap="none" rtlCol="0">
+            <a:spAutoFit/>
+          </a:bodyPr>
+          <a:lstStyle/>
+          <a:p>
+            <a:r>
+              <a:rPr lang="ja-JP" altLang="en-US" sz="1400" dirty="0"/>
+              <a:t>怪しげなサイト</a:t>
+            </a:r>
+            <a:endParaRPr lang="en-US" altLang="ja-JP" sz="1400" dirty="0"/>
+          </a:p>
+        </p:txBody>
+      </p:sp>
+      <p:pic>
+        <p:nvPicPr>
+          <p:cNvPr id="8" name="図 7">
+            <a:extLst>
+              <a:ext uri="{FF2B5EF4-FFF2-40B4-BE49-F238E27FC236}">
+                <a16:creationId xmlns:a16="http://schemas.microsoft.com/office/drawing/2014/main" id="{D636B1B5-71D9-C53B-5285-E95A2A6B22BE}"/>
+              </a:ext>
+            </a:extLst>
+          </p:cNvPr>
+          <p:cNvPicPr>
+            <a:picLocks noChangeAspect="1"/>
+          </p:cNvPicPr>
+          <p:nvPr/>
+        </p:nvPicPr>
+        <p:blipFill>
+          <a:blip r:embed="rId5">
+            <a:extLst>
+              <a:ext uri="{28A0092B-C50C-407E-A947-70E740481C1C}">
+                <a14:useLocalDpi xmlns:a14="http://schemas.microsoft.com/office/drawing/2010/main" val="0"/>
+              </a:ext>
+            </a:extLst>
+          </a:blip>
+          <a:stretch>
+            <a:fillRect/>
+          </a:stretch>
+        </p:blipFill>
+        <p:spPr>
+          <a:xfrm>
+            <a:off x="8163547" y="3248225"/>
+            <a:ext cx="660931" cy="969367"/>
+          </a:xfrm>
+          <a:prstGeom prst="rect">
+            <a:avLst/>
+          </a:prstGeom>
+        </p:spPr>
+      </p:pic>
+      <p:pic>
+        <p:nvPicPr>
+          <p:cNvPr id="11" name="図 10">
+            <a:extLst>
+              <a:ext uri="{FF2B5EF4-FFF2-40B4-BE49-F238E27FC236}">
+                <a16:creationId xmlns:a16="http://schemas.microsoft.com/office/drawing/2014/main" id="{91442839-35D2-9410-6531-D28A8BDEFBCA}"/>
+              </a:ext>
+            </a:extLst>
+          </p:cNvPr>
+          <p:cNvPicPr>
+            <a:picLocks noChangeAspect="1"/>
+          </p:cNvPicPr>
+          <p:nvPr/>
+        </p:nvPicPr>
+        <p:blipFill>
+          <a:blip r:embed="rId6">
+            <a:extLst>
+              <a:ext uri="{28A0092B-C50C-407E-A947-70E740481C1C}">
+                <a14:useLocalDpi xmlns:a14="http://schemas.microsoft.com/office/drawing/2010/main" val="0"/>
+              </a:ext>
+            </a:extLst>
+          </a:blip>
+          <a:stretch>
+            <a:fillRect/>
+          </a:stretch>
+        </p:blipFill>
+        <p:spPr>
+          <a:xfrm>
+            <a:off x="3904320" y="2369050"/>
+            <a:ext cx="575425" cy="411952"/>
+          </a:xfrm>
+          <a:prstGeom prst="rect">
+            <a:avLst/>
+          </a:prstGeom>
+        </p:spPr>
+      </p:pic>
+      <p:sp>
+        <p:nvSpPr>
+          <p:cNvPr id="12" name="テキスト ボックス 11">
+            <a:extLst>
+              <a:ext uri="{FF2B5EF4-FFF2-40B4-BE49-F238E27FC236}">
+                <a16:creationId xmlns:a16="http://schemas.microsoft.com/office/drawing/2014/main" id="{0D072E2A-1874-BEC8-26C5-6E4D9034B0F7}"/>
+              </a:ext>
+            </a:extLst>
+          </p:cNvPr>
+          <p:cNvSpPr txBox="1"/>
+          <p:nvPr/>
+        </p:nvSpPr>
+        <p:spPr>
+          <a:xfrm>
+            <a:off x="4538224" y="2404065"/>
+            <a:ext cx="1441420" cy="307777"/>
+          </a:xfrm>
+          <a:prstGeom prst="rect">
+            <a:avLst/>
+          </a:prstGeom>
+          <a:noFill/>
+        </p:spPr>
+        <p:txBody>
+          <a:bodyPr wrap="none" rtlCol="0">
+            <a:spAutoFit/>
+          </a:bodyPr>
+          <a:lstStyle/>
+          <a:p>
+            <a:r>
+              <a:rPr lang="ja-JP" altLang="en-US" sz="1400" dirty="0"/>
+              <a:t>インターネット</a:t>
+            </a:r>
+            <a:endParaRPr lang="en-US" altLang="ja-JP" sz="1400" dirty="0"/>
+          </a:p>
+        </p:txBody>
+      </p:sp>
+      <p:sp>
+        <p:nvSpPr>
+          <p:cNvPr id="16" name="テキスト ボックス 15">
+            <a:extLst>
+              <a:ext uri="{FF2B5EF4-FFF2-40B4-BE49-F238E27FC236}">
+                <a16:creationId xmlns:a16="http://schemas.microsoft.com/office/drawing/2014/main" id="{96E02442-98C1-4B2B-09B6-837E0E8A5CFB}"/>
+              </a:ext>
+            </a:extLst>
+          </p:cNvPr>
+          <p:cNvSpPr txBox="1"/>
+          <p:nvPr/>
+        </p:nvSpPr>
+        <p:spPr>
+          <a:xfrm>
+            <a:off x="7119145" y="4300458"/>
+            <a:ext cx="2012089" cy="307777"/>
+          </a:xfrm>
+          <a:prstGeom prst="rect">
+            <a:avLst/>
+          </a:prstGeom>
+          <a:noFill/>
+        </p:spPr>
+        <p:txBody>
+          <a:bodyPr wrap="none" rtlCol="0">
+            <a:spAutoFit/>
+          </a:bodyPr>
+          <a:lstStyle/>
+          <a:p>
+            <a:r>
+              <a:rPr kumimoji="1" lang="ja-JP" altLang="en-US" sz="1400" dirty="0"/>
+              <a:t>企業の </a:t>
+            </a:r>
+            <a:r>
+              <a:rPr kumimoji="1" lang="en-US" altLang="ja-JP" sz="1400" dirty="0"/>
+              <a:t>API </a:t>
+            </a:r>
+            <a:r>
+              <a:rPr kumimoji="1" lang="ja-JP" altLang="en-US" sz="1400" dirty="0"/>
+              <a:t>やデバイス</a:t>
+            </a:r>
+            <a:endParaRPr kumimoji="1" lang="en-US" altLang="ja-JP" sz="1400" dirty="0"/>
+          </a:p>
+        </p:txBody>
+      </p:sp>
+    </p:spTree>
+    <p:extLst>
+      <p:ext uri="{BB962C8B-B14F-4D97-AF65-F5344CB8AC3E}">
+        <p14:creationId xmlns:p14="http://schemas.microsoft.com/office/powerpoint/2010/main" val="3080926516"/>
+      </p:ext>
+    </p:extLst>
+  </p:cSld>
+  <p:clrMapOvr>
+    <a:masterClrMapping/>
+  </p:clrMapOvr>
+</p:sld>
+</file>
+
+<file path=ppt/slides/slide5.xml><?xml version="1.0" encoding="utf-8"?>
+<p:sld xmlns:a="http://schemas.openxmlformats.org/drawingml/2006/main" xmlns:r="http://schemas.openxmlformats.org/officeDocument/2006/relationships" xmlns:p="http://schemas.openxmlformats.org/presentationml/2006/main">
+  <p:cSld>
+    <p:spTree>
+      <p:nvGrpSpPr>
+        <p:cNvPr id="1" name="">
+          <a:extLst>
+            <a:ext uri="{FF2B5EF4-FFF2-40B4-BE49-F238E27FC236}">
+              <a16:creationId xmlns:a16="http://schemas.microsoft.com/office/drawing/2014/main" id="{C8E28B4C-7596-3A14-52E2-5A2DAD0AB40C}"/>
+            </a:ext>
+          </a:extLst>
+        </p:cNvPr>
+        <p:cNvGrpSpPr/>
+        <p:nvPr/>
+      </p:nvGrpSpPr>
+      <p:grpSpPr>
+        <a:xfrm>
+          <a:off x="0" y="0"/>
+          <a:ext cx="0" cy="0"/>
+          <a:chOff x="0" y="0"/>
+          <a:chExt cx="0" cy="0"/>
+        </a:xfrm>
+      </p:grpSpPr>
+      <p:sp>
+        <p:nvSpPr>
+          <p:cNvPr id="41" name="正方形/長方形 40">
+            <a:extLst>
+              <a:ext uri="{FF2B5EF4-FFF2-40B4-BE49-F238E27FC236}">
+                <a16:creationId xmlns:a16="http://schemas.microsoft.com/office/drawing/2014/main" id="{1FC56B8F-644E-0B1C-6838-77047FE15FB7}"/>
+              </a:ext>
+            </a:extLst>
+          </p:cNvPr>
+          <p:cNvSpPr/>
+          <p:nvPr/>
+        </p:nvSpPr>
+        <p:spPr>
+          <a:xfrm>
+            <a:off x="620211" y="854545"/>
+            <a:ext cx="11212488" cy="2832634"/>
+          </a:xfrm>
+          <a:prstGeom prst="rect">
+            <a:avLst/>
+          </a:prstGeom>
+          <a:solidFill>
+            <a:schemeClr val="bg1"/>
+          </a:solidFill>
+          <a:ln>
+            <a:noFill/>
+          </a:ln>
+          <a:effectLst>
+            <a:outerShdw blurRad="50800" dist="38100" dir="2700000" algn="tl" rotWithShape="0">
+              <a:prstClr val="black">
+                <a:alpha val="40000"/>
+              </a:prstClr>
+            </a:outerShdw>
+          </a:effectLst>
+        </p:spPr>
+        <p:style>
+          <a:lnRef idx="2">
+            <a:schemeClr val="accent1">
+              <a:shade val="15000"/>
+            </a:schemeClr>
+          </a:lnRef>
+          <a:fillRef idx="1">
+            <a:schemeClr val="accent1"/>
+          </a:fillRef>
+          <a:effectRef idx="0">
+            <a:schemeClr val="accent1"/>
+          </a:effectRef>
+          <a:fontRef idx="minor">
+            <a:schemeClr val="lt1"/>
+          </a:fontRef>
+        </p:style>
+        <p:txBody>
+          <a:bodyPr rtlCol="0" anchor="ctr"/>
+          <a:lstStyle/>
+          <a:p>
+            <a:pPr algn="ctr"/>
+            <a:endParaRPr kumimoji="1" lang="ja-JP" altLang="en-US" dirty="0"/>
+          </a:p>
+        </p:txBody>
+      </p:sp>
+      <p:sp>
+        <p:nvSpPr>
+          <p:cNvPr id="4" name="四角形: 角を丸くする 3">
+            <a:extLst>
+              <a:ext uri="{FF2B5EF4-FFF2-40B4-BE49-F238E27FC236}">
+                <a16:creationId xmlns:a16="http://schemas.microsoft.com/office/drawing/2014/main" id="{99713178-0895-CC96-9481-FCC78E3FF2F2}"/>
+              </a:ext>
+            </a:extLst>
+          </p:cNvPr>
+          <p:cNvSpPr/>
+          <p:nvPr/>
+        </p:nvSpPr>
+        <p:spPr>
+          <a:xfrm>
+            <a:off x="2222416" y="1555343"/>
+            <a:ext cx="7109309" cy="1951815"/>
+          </a:xfrm>
+          <a:prstGeom prst="roundRect">
+            <a:avLst>
+              <a:gd name="adj" fmla="val 10513"/>
+            </a:avLst>
+          </a:prstGeom>
+          <a:noFill/>
+        </p:spPr>
+        <p:style>
+          <a:lnRef idx="2">
+            <a:schemeClr val="accent1"/>
+          </a:lnRef>
+          <a:fillRef idx="1">
+            <a:schemeClr val="lt1"/>
+          </a:fillRef>
+          <a:effectRef idx="0">
+            <a:schemeClr val="accent1"/>
+          </a:effectRef>
+          <a:fontRef idx="minor">
+            <a:schemeClr val="dk1"/>
+          </a:fontRef>
+        </p:style>
+        <p:txBody>
+          <a:bodyPr rtlCol="0" anchor="ctr"/>
+          <a:lstStyle/>
+          <a:p>
+            <a:pPr algn="ctr"/>
+            <a:endParaRPr kumimoji="1" lang="ja-JP" altLang="en-US"/>
+          </a:p>
+        </p:txBody>
+      </p:sp>
+      <p:pic>
+        <p:nvPicPr>
+          <p:cNvPr id="6" name="グラフィックス 5">
+            <a:extLst>
+              <a:ext uri="{FF2B5EF4-FFF2-40B4-BE49-F238E27FC236}">
+                <a16:creationId xmlns:a16="http://schemas.microsoft.com/office/drawing/2014/main" id="{ABB5058E-7DB9-22C1-94F2-2FDBB43FA620}"/>
+              </a:ext>
+            </a:extLst>
+          </p:cNvPr>
+          <p:cNvPicPr>
+            <a:picLocks noChangeAspect="1"/>
+          </p:cNvPicPr>
+          <p:nvPr/>
+        </p:nvPicPr>
+        <p:blipFill>
+          <a:blip>
+            <a:extLst>
+              <a:ext uri="{96DAC541-7B7A-43D3-8B79-37D633B846F1}">
+                <asvg:svgBlip xmlns:asvg="http://schemas.microsoft.com/office/drawing/2016/SVG/main" r:embed="rId2"/>
+              </a:ext>
+            </a:extLst>
+          </a:blip>
+          <a:stretch>
+            <a:fillRect/>
+          </a:stretch>
+        </p:blipFill>
+        <p:spPr>
+          <a:xfrm>
+            <a:off x="4049196" y="2252074"/>
+            <a:ext cx="489169" cy="489169"/>
+          </a:xfrm>
+          <a:prstGeom prst="rect">
+            <a:avLst/>
+          </a:prstGeom>
+        </p:spPr>
+      </p:pic>
+      <p:sp>
+        <p:nvSpPr>
+          <p:cNvPr id="7" name="テキスト ボックス 6">
+            <a:extLst>
+              <a:ext uri="{FF2B5EF4-FFF2-40B4-BE49-F238E27FC236}">
+                <a16:creationId xmlns:a16="http://schemas.microsoft.com/office/drawing/2014/main" id="{C255A78A-052D-8990-08E5-F8DE2F19A196}"/>
+              </a:ext>
+            </a:extLst>
+          </p:cNvPr>
+          <p:cNvSpPr txBox="1"/>
+          <p:nvPr/>
+        </p:nvSpPr>
+        <p:spPr>
+          <a:xfrm>
+            <a:off x="3573071" y="2843043"/>
+            <a:ext cx="1441420" cy="523220"/>
+          </a:xfrm>
+          <a:prstGeom prst="rect">
+            <a:avLst/>
+          </a:prstGeom>
+          <a:noFill/>
+        </p:spPr>
+        <p:txBody>
+          <a:bodyPr wrap="none" rtlCol="0">
+            <a:spAutoFit/>
+          </a:bodyPr>
+          <a:lstStyle/>
+          <a:p>
+            <a:r>
+              <a:rPr kumimoji="1" lang="ja-JP" altLang="en-US" sz="1400" dirty="0"/>
+              <a:t>踏み台サーバー</a:t>
+            </a:r>
+            <a:br>
+              <a:rPr kumimoji="1" lang="en-US" altLang="ja-JP" sz="1400" dirty="0"/>
+            </a:br>
+            <a:r>
+              <a:rPr kumimoji="1" lang="en-US" altLang="ja-JP" sz="1400" dirty="0"/>
+              <a:t>(</a:t>
+            </a:r>
+            <a:r>
+              <a:rPr kumimoji="1" lang="en-US" altLang="ja-JP" sz="1400" dirty="0" err="1"/>
+              <a:t>Jumpbox</a:t>
+            </a:r>
+            <a:r>
+              <a:rPr kumimoji="1" lang="en-US" altLang="ja-JP" sz="1400" dirty="0"/>
+              <a:t> VM)</a:t>
+            </a:r>
+            <a:endParaRPr kumimoji="1" lang="ja-JP" altLang="en-US" sz="1400" dirty="0"/>
+          </a:p>
+        </p:txBody>
+      </p:sp>
+      <p:pic>
+        <p:nvPicPr>
+          <p:cNvPr id="9" name="グラフィックス 8">
+            <a:extLst>
+              <a:ext uri="{FF2B5EF4-FFF2-40B4-BE49-F238E27FC236}">
+                <a16:creationId xmlns:a16="http://schemas.microsoft.com/office/drawing/2014/main" id="{0B26C757-7729-7939-03AA-36548CC89D9D}"/>
+              </a:ext>
+            </a:extLst>
+          </p:cNvPr>
+          <p:cNvPicPr>
+            <a:picLocks noChangeAspect="1"/>
+          </p:cNvPicPr>
+          <p:nvPr/>
+        </p:nvPicPr>
+        <p:blipFill>
+          <a:blip>
+            <a:extLst>
+              <a:ext uri="{96DAC541-7B7A-43D3-8B79-37D633B846F1}">
+                <asvg:svgBlip xmlns:asvg="http://schemas.microsoft.com/office/drawing/2016/SVG/main" r:embed="rId3"/>
+              </a:ext>
+            </a:extLst>
+          </a:blip>
+          <a:stretch>
+            <a:fillRect/>
+          </a:stretch>
+        </p:blipFill>
+        <p:spPr>
+          <a:xfrm>
+            <a:off x="976395" y="2206290"/>
+            <a:ext cx="489169" cy="489169"/>
+          </a:xfrm>
+          <a:prstGeom prst="rect">
+            <a:avLst/>
+          </a:prstGeom>
+        </p:spPr>
+      </p:pic>
+      <p:pic>
+        <p:nvPicPr>
+          <p:cNvPr id="13" name="グラフィックス 12">
+            <a:extLst>
+              <a:ext uri="{FF2B5EF4-FFF2-40B4-BE49-F238E27FC236}">
+                <a16:creationId xmlns:a16="http://schemas.microsoft.com/office/drawing/2014/main" id="{C14FA8BE-CCEC-C2A5-AA50-0903B971F89E}"/>
+              </a:ext>
+            </a:extLst>
+          </p:cNvPr>
+          <p:cNvPicPr>
+            <a:picLocks noChangeAspect="1"/>
+          </p:cNvPicPr>
+          <p:nvPr/>
+        </p:nvPicPr>
+        <p:blipFill>
+          <a:blip>
+            <a:extLst>
+              <a:ext uri="{96DAC541-7B7A-43D3-8B79-37D633B846F1}">
+                <asvg:svgBlip xmlns:asvg="http://schemas.microsoft.com/office/drawing/2016/SVG/main" r:embed="rId4"/>
+              </a:ext>
+            </a:extLst>
+          </a:blip>
+          <a:stretch>
+            <a:fillRect/>
+          </a:stretch>
+        </p:blipFill>
+        <p:spPr>
+          <a:xfrm>
+            <a:off x="2331105" y="1567622"/>
+            <a:ext cx="404272" cy="404272"/>
+          </a:xfrm>
+          <a:prstGeom prst="rect">
+            <a:avLst/>
+          </a:prstGeom>
+        </p:spPr>
+      </p:pic>
+      <p:sp>
+        <p:nvSpPr>
+          <p:cNvPr id="15" name="テキスト ボックス 14">
+            <a:extLst>
+              <a:ext uri="{FF2B5EF4-FFF2-40B4-BE49-F238E27FC236}">
+                <a16:creationId xmlns:a16="http://schemas.microsoft.com/office/drawing/2014/main" id="{EFCC9F07-30FC-3A43-DAD2-3027B9AB435F}"/>
+              </a:ext>
+            </a:extLst>
+          </p:cNvPr>
+          <p:cNvSpPr txBox="1"/>
+          <p:nvPr/>
+        </p:nvSpPr>
+        <p:spPr>
+          <a:xfrm>
+            <a:off x="2773729" y="1607129"/>
+            <a:ext cx="659155" cy="307777"/>
+          </a:xfrm>
+          <a:prstGeom prst="rect">
+            <a:avLst/>
+          </a:prstGeom>
+          <a:noFill/>
+        </p:spPr>
+        <p:txBody>
+          <a:bodyPr wrap="none" rtlCol="0">
+            <a:spAutoFit/>
+          </a:bodyPr>
+          <a:lstStyle/>
+          <a:p>
+            <a:r>
+              <a:rPr kumimoji="1" lang="en-US" altLang="ja-JP" sz="1400" dirty="0"/>
+              <a:t>VNET</a:t>
+            </a:r>
+            <a:endParaRPr kumimoji="1" lang="ja-JP" altLang="en-US" sz="1400" dirty="0"/>
+          </a:p>
+        </p:txBody>
+      </p:sp>
+      <p:pic>
+        <p:nvPicPr>
+          <p:cNvPr id="17" name="グラフィックス 16">
+            <a:extLst>
+              <a:ext uri="{FF2B5EF4-FFF2-40B4-BE49-F238E27FC236}">
+                <a16:creationId xmlns:a16="http://schemas.microsoft.com/office/drawing/2014/main" id="{239BB336-EC02-88A0-2349-76D1E4475482}"/>
+              </a:ext>
+            </a:extLst>
+          </p:cNvPr>
+          <p:cNvPicPr>
+            <a:picLocks noChangeAspect="1"/>
+          </p:cNvPicPr>
+          <p:nvPr/>
+        </p:nvPicPr>
+        <p:blipFill>
+          <a:blip>
+            <a:extLst>
+              <a:ext uri="{96DAC541-7B7A-43D3-8B79-37D633B846F1}">
+                <asvg:svgBlip xmlns:asvg="http://schemas.microsoft.com/office/drawing/2016/SVG/main" r:embed="rId5"/>
+              </a:ext>
+            </a:extLst>
+          </a:blip>
+          <a:stretch>
+            <a:fillRect/>
+          </a:stretch>
+        </p:blipFill>
+        <p:spPr>
+          <a:xfrm>
+            <a:off x="8116219" y="2252074"/>
+            <a:ext cx="489169" cy="489169"/>
+          </a:xfrm>
+          <a:prstGeom prst="rect">
+            <a:avLst/>
+          </a:prstGeom>
+        </p:spPr>
+      </p:pic>
+      <p:sp>
+        <p:nvSpPr>
+          <p:cNvPr id="19" name="テキスト ボックス 18">
+            <a:extLst>
+              <a:ext uri="{FF2B5EF4-FFF2-40B4-BE49-F238E27FC236}">
+                <a16:creationId xmlns:a16="http://schemas.microsoft.com/office/drawing/2014/main" id="{B091E0EC-F2CD-610F-E853-9AF19510048C}"/>
+              </a:ext>
+            </a:extLst>
+          </p:cNvPr>
+          <p:cNvSpPr txBox="1"/>
+          <p:nvPr/>
+        </p:nvSpPr>
+        <p:spPr>
+          <a:xfrm>
+            <a:off x="7582385" y="2977434"/>
+            <a:ext cx="1556836" cy="307777"/>
+          </a:xfrm>
+          <a:prstGeom prst="rect">
+            <a:avLst/>
+          </a:prstGeom>
+          <a:noFill/>
+        </p:spPr>
+        <p:txBody>
+          <a:bodyPr wrap="none" rtlCol="0">
+            <a:spAutoFit/>
+          </a:bodyPr>
+          <a:lstStyle/>
+          <a:p>
+            <a:r>
+              <a:rPr lang="en-US" altLang="ja-JP" sz="1400" dirty="0"/>
+              <a:t>Private Endpoint</a:t>
+            </a:r>
+            <a:endParaRPr kumimoji="1" lang="ja-JP" altLang="en-US" sz="1400" dirty="0"/>
+          </a:p>
+        </p:txBody>
+      </p:sp>
+      <p:pic>
+        <p:nvPicPr>
+          <p:cNvPr id="20" name="図 19" descr="Aspire — あなたのスタックをシンプルに">
+            <a:extLst>
+              <a:ext uri="{FF2B5EF4-FFF2-40B4-BE49-F238E27FC236}">
+                <a16:creationId xmlns:a16="http://schemas.microsoft.com/office/drawing/2014/main" id="{119C9D51-7E67-8E4E-25B8-7A4349494984}"/>
+              </a:ext>
+            </a:extLst>
+          </p:cNvPr>
+          <p:cNvPicPr>
+            <a:picLocks noChangeAspect="1"/>
+          </p:cNvPicPr>
+          <p:nvPr/>
+        </p:nvPicPr>
+        <p:blipFill>
+          <a:blip r:embed="rId6"/>
+          <a:stretch>
+            <a:fillRect/>
+          </a:stretch>
+        </p:blipFill>
+        <p:spPr>
+          <a:xfrm>
+            <a:off x="10631086" y="2121082"/>
+            <a:ext cx="751153" cy="751153"/>
+          </a:xfrm>
+          <a:prstGeom prst="rect">
+            <a:avLst/>
+          </a:prstGeom>
+        </p:spPr>
+      </p:pic>
+      <p:cxnSp>
+        <p:nvCxnSpPr>
+          <p:cNvPr id="22" name="直線矢印コネクタ 21">
+            <a:extLst>
+              <a:ext uri="{FF2B5EF4-FFF2-40B4-BE49-F238E27FC236}">
+                <a16:creationId xmlns:a16="http://schemas.microsoft.com/office/drawing/2014/main" id="{B6E3CC9F-8BE8-39F8-4ECB-A45C0650BBE1}"/>
+              </a:ext>
+            </a:extLst>
+          </p:cNvPr>
+          <p:cNvCxnSpPr/>
+          <p:nvPr/>
+        </p:nvCxnSpPr>
+        <p:spPr>
+          <a:xfrm>
+            <a:off x="4738731" y="2531250"/>
+            <a:ext cx="3227241" cy="0"/>
+          </a:xfrm>
+          <a:prstGeom prst="straightConnector1">
+            <a:avLst/>
+          </a:prstGeom>
+          <a:ln>
+            <a:headEnd type="none" w="med" len="med"/>
+            <a:tailEnd type="arrow" w="med" len="med"/>
+          </a:ln>
+        </p:spPr>
+        <p:style>
+          <a:lnRef idx="2">
+            <a:schemeClr val="accent3"/>
+          </a:lnRef>
+          <a:fillRef idx="0">
+            <a:schemeClr val="accent3"/>
+          </a:fillRef>
+          <a:effectRef idx="1">
+            <a:schemeClr val="accent3"/>
+          </a:effectRef>
+          <a:fontRef idx="minor">
+            <a:schemeClr val="tx1"/>
+          </a:fontRef>
+        </p:style>
+      </p:cxnSp>
+      <p:cxnSp>
+        <p:nvCxnSpPr>
+          <p:cNvPr id="23" name="直線矢印コネクタ 22">
+            <a:extLst>
+              <a:ext uri="{FF2B5EF4-FFF2-40B4-BE49-F238E27FC236}">
+                <a16:creationId xmlns:a16="http://schemas.microsoft.com/office/drawing/2014/main" id="{F0AB229A-D30E-528B-F078-57B3451D1269}"/>
+              </a:ext>
+            </a:extLst>
+          </p:cNvPr>
+          <p:cNvCxnSpPr/>
+          <p:nvPr/>
+        </p:nvCxnSpPr>
+        <p:spPr>
+          <a:xfrm>
+            <a:off x="8797332" y="2531250"/>
+            <a:ext cx="1821694" cy="0"/>
+          </a:xfrm>
+          <a:prstGeom prst="straightConnector1">
+            <a:avLst/>
+          </a:prstGeom>
+          <a:ln>
+            <a:solidFill>
+              <a:schemeClr val="bg2">
+                <a:lumMod val="10000"/>
+              </a:schemeClr>
+            </a:solidFill>
+            <a:prstDash val="dash"/>
+            <a:headEnd type="none" w="med" len="med"/>
+            <a:tailEnd type="arrow" w="med" len="med"/>
+          </a:ln>
+        </p:spPr>
+        <p:style>
+          <a:lnRef idx="2">
+            <a:schemeClr val="accent3"/>
+          </a:lnRef>
+          <a:fillRef idx="0">
+            <a:schemeClr val="accent3"/>
+          </a:fillRef>
+          <a:effectRef idx="1">
+            <a:schemeClr val="accent3"/>
+          </a:effectRef>
+          <a:fontRef idx="minor">
+            <a:schemeClr val="tx1"/>
+          </a:fontRef>
+        </p:style>
+      </p:cxnSp>
+      <p:cxnSp>
+        <p:nvCxnSpPr>
+          <p:cNvPr id="24" name="直線矢印コネクタ 23">
+            <a:extLst>
+              <a:ext uri="{FF2B5EF4-FFF2-40B4-BE49-F238E27FC236}">
+                <a16:creationId xmlns:a16="http://schemas.microsoft.com/office/drawing/2014/main" id="{F61FC529-03C2-5E4A-B041-6B1AF35B00B4}"/>
+              </a:ext>
+            </a:extLst>
+          </p:cNvPr>
+          <p:cNvCxnSpPr/>
+          <p:nvPr/>
+        </p:nvCxnSpPr>
+        <p:spPr>
+          <a:xfrm>
+            <a:off x="1557827" y="2538312"/>
+            <a:ext cx="2204249" cy="0"/>
+          </a:xfrm>
+          <a:prstGeom prst="straightConnector1">
+            <a:avLst/>
+          </a:prstGeom>
+          <a:ln>
+            <a:solidFill>
+              <a:schemeClr val="bg2">
+                <a:lumMod val="10000"/>
+              </a:schemeClr>
+            </a:solidFill>
+            <a:prstDash val="dash"/>
+            <a:headEnd type="none" w="med" len="med"/>
+            <a:tailEnd type="arrow" w="med" len="med"/>
+          </a:ln>
+        </p:spPr>
+        <p:style>
+          <a:lnRef idx="2">
+            <a:schemeClr val="accent3"/>
+          </a:lnRef>
+          <a:fillRef idx="0">
+            <a:schemeClr val="accent3"/>
+          </a:fillRef>
+          <a:effectRef idx="1">
+            <a:schemeClr val="accent3"/>
+          </a:effectRef>
+          <a:fontRef idx="minor">
+            <a:schemeClr val="tx1"/>
+          </a:fontRef>
+        </p:style>
+      </p:cxnSp>
+      <p:sp>
+        <p:nvSpPr>
+          <p:cNvPr id="26" name="テキスト ボックス 25">
+            <a:extLst>
+              <a:ext uri="{FF2B5EF4-FFF2-40B4-BE49-F238E27FC236}">
+                <a16:creationId xmlns:a16="http://schemas.microsoft.com/office/drawing/2014/main" id="{1E0C7259-CCBB-DCC1-D785-C036784228B2}"/>
+              </a:ext>
+            </a:extLst>
+          </p:cNvPr>
+          <p:cNvSpPr txBox="1"/>
+          <p:nvPr/>
+        </p:nvSpPr>
+        <p:spPr>
+          <a:xfrm>
+            <a:off x="814457" y="2826452"/>
+            <a:ext cx="813043" cy="307777"/>
+          </a:xfrm>
+          <a:prstGeom prst="rect">
+            <a:avLst/>
+          </a:prstGeom>
+          <a:noFill/>
+        </p:spPr>
+        <p:txBody>
+          <a:bodyPr wrap="none" rtlCol="0">
+            <a:spAutoFit/>
+          </a:bodyPr>
+          <a:lstStyle/>
+          <a:p>
+            <a:r>
+              <a:rPr lang="en-US" altLang="ja-JP" sz="1400" dirty="0"/>
+              <a:t>Bastion</a:t>
+            </a:r>
+            <a:endParaRPr kumimoji="1" lang="ja-JP" altLang="en-US" sz="1400" dirty="0"/>
+          </a:p>
+        </p:txBody>
+      </p:sp>
+      <p:sp>
+        <p:nvSpPr>
+          <p:cNvPr id="28" name="テキスト ボックス 27">
+            <a:extLst>
+              <a:ext uri="{FF2B5EF4-FFF2-40B4-BE49-F238E27FC236}">
+                <a16:creationId xmlns:a16="http://schemas.microsoft.com/office/drawing/2014/main" id="{4DD19428-9756-44C7-5353-4F24705C4273}"/>
+              </a:ext>
+            </a:extLst>
+          </p:cNvPr>
+          <p:cNvSpPr txBox="1"/>
+          <p:nvPr/>
+        </p:nvSpPr>
+        <p:spPr>
+          <a:xfrm>
+            <a:off x="2601311" y="2237328"/>
+            <a:ext cx="1000595" cy="307777"/>
+          </a:xfrm>
+          <a:prstGeom prst="rect">
+            <a:avLst/>
+          </a:prstGeom>
+          <a:noFill/>
+        </p:spPr>
+        <p:txBody>
+          <a:bodyPr wrap="none" rtlCol="0">
+            <a:spAutoFit/>
+          </a:bodyPr>
+          <a:lstStyle/>
+          <a:p>
+            <a:r>
+              <a:rPr kumimoji="1" lang="en-US" altLang="ja-JP" sz="1400" dirty="0"/>
+              <a:t>RDP/SSH</a:t>
+            </a:r>
+            <a:endParaRPr kumimoji="1" lang="ja-JP" altLang="en-US" sz="1400" dirty="0"/>
+          </a:p>
+        </p:txBody>
+      </p:sp>
+      <p:sp>
+        <p:nvSpPr>
+          <p:cNvPr id="30" name="テキスト ボックス 29">
+            <a:extLst>
+              <a:ext uri="{FF2B5EF4-FFF2-40B4-BE49-F238E27FC236}">
+                <a16:creationId xmlns:a16="http://schemas.microsoft.com/office/drawing/2014/main" id="{4D96CF32-940F-A2EF-C7A8-F514CF8D3F80}"/>
+              </a:ext>
+            </a:extLst>
+          </p:cNvPr>
+          <p:cNvSpPr txBox="1"/>
+          <p:nvPr/>
+        </p:nvSpPr>
+        <p:spPr>
+          <a:xfrm>
+            <a:off x="5083406" y="1942439"/>
+            <a:ext cx="2601994" cy="523220"/>
+          </a:xfrm>
+          <a:prstGeom prst="rect">
+            <a:avLst/>
+          </a:prstGeom>
+          <a:noFill/>
+        </p:spPr>
+        <p:txBody>
+          <a:bodyPr wrap="none" rtlCol="0">
+            <a:spAutoFit/>
+          </a:bodyPr>
+          <a:lstStyle/>
+          <a:p>
+            <a:r>
+              <a:rPr lang="en-US" altLang="ja-JP" sz="1400" dirty="0"/>
+              <a:t>Foundry API</a:t>
+            </a:r>
+          </a:p>
+          <a:p>
+            <a:r>
+              <a:rPr kumimoji="1" lang="en-US" altLang="ja-JP" sz="1400" dirty="0">
+                <a:hlinkClick r:id="rId7"/>
+              </a:rPr>
+              <a:t>https://services.ai.azure.com</a:t>
+            </a:r>
+            <a:endParaRPr kumimoji="1" lang="ja-JP" altLang="en-US" sz="1400" dirty="0"/>
+          </a:p>
+        </p:txBody>
+      </p:sp>
+      <p:sp>
+        <p:nvSpPr>
+          <p:cNvPr id="32" name="テキスト ボックス 31">
+            <a:extLst>
+              <a:ext uri="{FF2B5EF4-FFF2-40B4-BE49-F238E27FC236}">
+                <a16:creationId xmlns:a16="http://schemas.microsoft.com/office/drawing/2014/main" id="{849BE6DF-B94F-48D9-5D48-092DE58F7A9E}"/>
+              </a:ext>
+            </a:extLst>
+          </p:cNvPr>
+          <p:cNvSpPr txBox="1"/>
+          <p:nvPr/>
+        </p:nvSpPr>
+        <p:spPr>
+          <a:xfrm>
+            <a:off x="9318691" y="2237327"/>
+            <a:ext cx="1172116" cy="307777"/>
+          </a:xfrm>
+          <a:prstGeom prst="rect">
+            <a:avLst/>
+          </a:prstGeom>
+          <a:noFill/>
+        </p:spPr>
+        <p:txBody>
+          <a:bodyPr wrap="none" rtlCol="0">
+            <a:spAutoFit/>
+          </a:bodyPr>
+          <a:lstStyle/>
+          <a:p>
+            <a:r>
+              <a:rPr lang="en-US" altLang="ja-JP" sz="1400" dirty="0"/>
+              <a:t>Private Link</a:t>
+            </a:r>
+            <a:endParaRPr kumimoji="1" lang="ja-JP" altLang="en-US" sz="1400" dirty="0"/>
+          </a:p>
+        </p:txBody>
+      </p:sp>
+      <p:sp>
+        <p:nvSpPr>
+          <p:cNvPr id="34" name="テキスト ボックス 33">
+            <a:extLst>
+              <a:ext uri="{FF2B5EF4-FFF2-40B4-BE49-F238E27FC236}">
+                <a16:creationId xmlns:a16="http://schemas.microsoft.com/office/drawing/2014/main" id="{736DE43E-3984-FA0D-0149-11FFBF1BFF44}"/>
+              </a:ext>
+            </a:extLst>
+          </p:cNvPr>
+          <p:cNvSpPr txBox="1"/>
+          <p:nvPr/>
+        </p:nvSpPr>
+        <p:spPr>
+          <a:xfrm>
+            <a:off x="10051159" y="3026123"/>
+            <a:ext cx="1701107" cy="307777"/>
+          </a:xfrm>
+          <a:prstGeom prst="rect">
+            <a:avLst/>
+          </a:prstGeom>
+          <a:noFill/>
+        </p:spPr>
+        <p:txBody>
+          <a:bodyPr wrap="none" rtlCol="0">
+            <a:spAutoFit/>
+          </a:bodyPr>
+          <a:lstStyle/>
+          <a:p>
+            <a:r>
+              <a:rPr lang="en-US" altLang="ja-JP" sz="1400" dirty="0"/>
+              <a:t>Microsoft Foundry</a:t>
+            </a:r>
+            <a:endParaRPr kumimoji="1" lang="ja-JP" altLang="en-US" sz="1400" dirty="0"/>
+          </a:p>
+        </p:txBody>
+      </p:sp>
+      <p:sp>
+        <p:nvSpPr>
+          <p:cNvPr id="2" name="吹き出し: 角を丸めた四角形 1">
+            <a:extLst>
+              <a:ext uri="{FF2B5EF4-FFF2-40B4-BE49-F238E27FC236}">
+                <a16:creationId xmlns:a16="http://schemas.microsoft.com/office/drawing/2014/main" id="{9F4D3722-4DDC-BD8A-3466-0E01B424D604}"/>
+              </a:ext>
+            </a:extLst>
+          </p:cNvPr>
+          <p:cNvSpPr/>
+          <p:nvPr/>
+        </p:nvSpPr>
+        <p:spPr>
+          <a:xfrm>
+            <a:off x="3793494" y="1009291"/>
+            <a:ext cx="1493371" cy="890389"/>
+          </a:xfrm>
+          <a:prstGeom prst="wedgeRoundRectCallout">
+            <a:avLst>
+              <a:gd name="adj1" fmla="val -20022"/>
+              <a:gd name="adj2" fmla="val 103026"/>
+              <a:gd name="adj3" fmla="val 16667"/>
+            </a:avLst>
+          </a:prstGeom>
+        </p:spPr>
+        <p:style>
+          <a:lnRef idx="2">
+            <a:schemeClr val="accent1"/>
+          </a:lnRef>
+          <a:fillRef idx="1">
+            <a:schemeClr val="lt1"/>
+          </a:fillRef>
+          <a:effectRef idx="0">
+            <a:schemeClr val="accent1"/>
+          </a:effectRef>
+          <a:fontRef idx="minor">
+            <a:schemeClr val="dk1"/>
+          </a:fontRef>
+        </p:style>
+        <p:txBody>
+          <a:bodyPr rtlCol="0" anchor="ctr"/>
+          <a:lstStyle/>
+          <a:p>
+            <a:pPr algn="ctr"/>
+            <a:endParaRPr kumimoji="1" lang="ja-JP" altLang="en-US"/>
+          </a:p>
+        </p:txBody>
+      </p:sp>
+      <p:pic>
+        <p:nvPicPr>
+          <p:cNvPr id="10" name="図 9">
+            <a:extLst>
+              <a:ext uri="{FF2B5EF4-FFF2-40B4-BE49-F238E27FC236}">
+                <a16:creationId xmlns:a16="http://schemas.microsoft.com/office/drawing/2014/main" id="{D367A0A5-AB14-5A88-7A56-A079E5570956}"/>
+              </a:ext>
+            </a:extLst>
+          </p:cNvPr>
+          <p:cNvPicPr>
+            <a:picLocks noChangeAspect="1"/>
+          </p:cNvPicPr>
+          <p:nvPr/>
+        </p:nvPicPr>
+        <p:blipFill>
+          <a:blip r:embed="rId8">
+            <a:extLst>
+              <a:ext uri="{28A0092B-C50C-407E-A947-70E740481C1C}">
+                <a14:useLocalDpi xmlns:a14="http://schemas.microsoft.com/office/drawing/2010/main" val="0"/>
+              </a:ext>
+            </a:extLst>
+          </a:blip>
+          <a:stretch>
+            <a:fillRect/>
+          </a:stretch>
+        </p:blipFill>
+        <p:spPr>
+          <a:xfrm>
+            <a:off x="3972097" y="1163247"/>
+            <a:ext cx="444348" cy="444348"/>
+          </a:xfrm>
+          <a:prstGeom prst="rect">
+            <a:avLst/>
+          </a:prstGeom>
+        </p:spPr>
+      </p:pic>
+      <p:pic>
+        <p:nvPicPr>
+          <p:cNvPr id="12" name="グラフィックス 11">
+            <a:extLst>
+              <a:ext uri="{FF2B5EF4-FFF2-40B4-BE49-F238E27FC236}">
+                <a16:creationId xmlns:a16="http://schemas.microsoft.com/office/drawing/2014/main" id="{A617360A-4154-1F44-BFFB-C7B6E433CDBB}"/>
+              </a:ext>
+            </a:extLst>
+          </p:cNvPr>
+          <p:cNvPicPr>
+            <a:picLocks noChangeAspect="1"/>
+          </p:cNvPicPr>
+          <p:nvPr/>
+        </p:nvPicPr>
+        <p:blipFill>
+          <a:blip>
+            <a:extLst>
+              <a:ext uri="{96DAC541-7B7A-43D3-8B79-37D633B846F1}">
+                <asvg:svgBlip xmlns:asvg="http://schemas.microsoft.com/office/drawing/2016/SVG/main" r:embed="rId9"/>
+              </a:ext>
+            </a:extLst>
+          </a:blip>
+          <a:stretch>
+            <a:fillRect/>
+          </a:stretch>
+        </p:blipFill>
+        <p:spPr>
+          <a:xfrm>
+            <a:off x="4636335" y="1162673"/>
+            <a:ext cx="444699" cy="444699"/>
+          </a:xfrm>
+          <a:prstGeom prst="rect">
+            <a:avLst/>
+          </a:prstGeom>
+        </p:spPr>
+      </p:pic>
+      <p:sp>
+        <p:nvSpPr>
+          <p:cNvPr id="16" name="テキスト ボックス 15">
+            <a:extLst>
+              <a:ext uri="{FF2B5EF4-FFF2-40B4-BE49-F238E27FC236}">
+                <a16:creationId xmlns:a16="http://schemas.microsoft.com/office/drawing/2014/main" id="{C0BE5CCB-CE57-A55E-6071-9587DB979B95}"/>
+              </a:ext>
+            </a:extLst>
+          </p:cNvPr>
+          <p:cNvSpPr txBox="1"/>
+          <p:nvPr/>
+        </p:nvSpPr>
+        <p:spPr>
+          <a:xfrm>
+            <a:off x="4001892" y="1613282"/>
+            <a:ext cx="1079142" cy="307777"/>
+          </a:xfrm>
+          <a:prstGeom prst="rect">
+            <a:avLst/>
+          </a:prstGeom>
+          <a:noFill/>
+        </p:spPr>
+        <p:txBody>
+          <a:bodyPr wrap="none" rtlCol="0">
+            <a:spAutoFit/>
+          </a:bodyPr>
+          <a:lstStyle/>
+          <a:p>
+            <a:r>
+              <a:rPr kumimoji="1" lang="en-US" altLang="ja-JP" sz="1400" dirty="0"/>
+              <a:t>Client Tool</a:t>
+            </a:r>
+            <a:endParaRPr kumimoji="1" lang="ja-JP" altLang="en-US" sz="1400" dirty="0"/>
+          </a:p>
+        </p:txBody>
+      </p:sp>
+    </p:spTree>
+    <p:extLst>
+      <p:ext uri="{BB962C8B-B14F-4D97-AF65-F5344CB8AC3E}">
+        <p14:creationId xmlns:p14="http://schemas.microsoft.com/office/powerpoint/2010/main" val="933193364"/>
+      </p:ext>
+    </p:extLst>
+  </p:cSld>
+  <p:clrMapOvr>
+    <a:masterClrMapping/>
+  </p:clrMapOvr>
+</p:sld>
+</file>
+
+<file path=ppt/slides/slide6.xml><?xml version="1.0" encoding="utf-8"?>
+<p:sld xmlns:a="http://schemas.openxmlformats.org/drawingml/2006/main" xmlns:r="http://schemas.openxmlformats.org/officeDocument/2006/relationships" xmlns:p="http://schemas.openxmlformats.org/presentationml/2006/main">
+  <p:cSld>
+    <p:spTree>
+      <p:nvGrpSpPr>
+        <p:cNvPr id="1" name="">
+          <a:extLst>
+            <a:ext uri="{FF2B5EF4-FFF2-40B4-BE49-F238E27FC236}">
+              <a16:creationId xmlns:a16="http://schemas.microsoft.com/office/drawing/2014/main" id="{5709B568-520A-5A46-5AB4-50C985B9B239}"/>
+            </a:ext>
+          </a:extLst>
+        </p:cNvPr>
+        <p:cNvGrpSpPr/>
+        <p:nvPr/>
+      </p:nvGrpSpPr>
+      <p:grpSpPr>
+        <a:xfrm>
+          <a:off x="0" y="0"/>
+          <a:ext cx="0" cy="0"/>
+          <a:chOff x="0" y="0"/>
+          <a:chExt cx="0" cy="0"/>
+        </a:xfrm>
+      </p:grpSpPr>
+      <p:sp>
+        <p:nvSpPr>
+          <p:cNvPr id="41" name="正方形/長方形 40">
+            <a:extLst>
+              <a:ext uri="{FF2B5EF4-FFF2-40B4-BE49-F238E27FC236}">
+                <a16:creationId xmlns:a16="http://schemas.microsoft.com/office/drawing/2014/main" id="{74E39517-E6B3-AADC-E8CF-4D4F508A1175}"/>
+              </a:ext>
+            </a:extLst>
+          </p:cNvPr>
+          <p:cNvSpPr/>
+          <p:nvPr/>
+        </p:nvSpPr>
+        <p:spPr>
+          <a:xfrm>
+            <a:off x="677482" y="748406"/>
+            <a:ext cx="11212488" cy="3945976"/>
+          </a:xfrm>
+          <a:prstGeom prst="rect">
+            <a:avLst/>
+          </a:prstGeom>
+          <a:solidFill>
+            <a:schemeClr val="bg1"/>
+          </a:solidFill>
+          <a:ln>
+            <a:noFill/>
+          </a:ln>
+          <a:effectLst>
+            <a:outerShdw blurRad="50800" dist="38100" dir="2700000" algn="tl" rotWithShape="0">
+              <a:prstClr val="black">
+                <a:alpha val="40000"/>
+              </a:prstClr>
+            </a:outerShdw>
+          </a:effectLst>
+        </p:spPr>
+        <p:style>
+          <a:lnRef idx="2">
+            <a:schemeClr val="accent1">
+              <a:shade val="15000"/>
+            </a:schemeClr>
+          </a:lnRef>
+          <a:fillRef idx="1">
+            <a:schemeClr val="accent1"/>
+          </a:fillRef>
+          <a:effectRef idx="0">
+            <a:schemeClr val="accent1"/>
+          </a:effectRef>
+          <a:fontRef idx="minor">
+            <a:schemeClr val="lt1"/>
+          </a:fontRef>
+        </p:style>
+        <p:txBody>
+          <a:bodyPr rtlCol="0" anchor="ctr"/>
+          <a:lstStyle/>
+          <a:p>
+            <a:pPr algn="ctr"/>
+            <a:endParaRPr kumimoji="1" lang="ja-JP" altLang="en-US" dirty="0"/>
+          </a:p>
+        </p:txBody>
+      </p:sp>
+      <p:sp>
+        <p:nvSpPr>
+          <p:cNvPr id="4" name="四角形: 角を丸くする 3">
+            <a:extLst>
+              <a:ext uri="{FF2B5EF4-FFF2-40B4-BE49-F238E27FC236}">
+                <a16:creationId xmlns:a16="http://schemas.microsoft.com/office/drawing/2014/main" id="{C62E6944-1EE6-C971-E2DD-41D07D0CE3C3}"/>
+              </a:ext>
+            </a:extLst>
+          </p:cNvPr>
+          <p:cNvSpPr/>
+          <p:nvPr/>
+        </p:nvSpPr>
+        <p:spPr>
+          <a:xfrm>
+            <a:off x="2137637" y="2506077"/>
+            <a:ext cx="7109309" cy="1951815"/>
+          </a:xfrm>
+          <a:prstGeom prst="roundRect">
+            <a:avLst>
+              <a:gd name="adj" fmla="val 10513"/>
+            </a:avLst>
+          </a:prstGeom>
+          <a:noFill/>
+        </p:spPr>
+        <p:style>
+          <a:lnRef idx="2">
+            <a:schemeClr val="accent1"/>
+          </a:lnRef>
+          <a:fillRef idx="1">
+            <a:schemeClr val="lt1"/>
+          </a:fillRef>
+          <a:effectRef idx="0">
+            <a:schemeClr val="accent1"/>
+          </a:effectRef>
+          <a:fontRef idx="minor">
+            <a:schemeClr val="dk1"/>
+          </a:fontRef>
+        </p:style>
+        <p:txBody>
+          <a:bodyPr rtlCol="0" anchor="ctr"/>
+          <a:lstStyle/>
+          <a:p>
+            <a:pPr algn="ctr"/>
+            <a:endParaRPr kumimoji="1" lang="ja-JP" altLang="en-US"/>
+          </a:p>
+        </p:txBody>
+      </p:sp>
+      <p:pic>
+        <p:nvPicPr>
+          <p:cNvPr id="6" name="グラフィックス 5">
+            <a:extLst>
+              <a:ext uri="{FF2B5EF4-FFF2-40B4-BE49-F238E27FC236}">
+                <a16:creationId xmlns:a16="http://schemas.microsoft.com/office/drawing/2014/main" id="{FC8661B1-C172-9B97-5897-72F2999B1EB3}"/>
+              </a:ext>
+            </a:extLst>
+          </p:cNvPr>
+          <p:cNvPicPr>
+            <a:picLocks noChangeAspect="1"/>
+          </p:cNvPicPr>
+          <p:nvPr/>
+        </p:nvPicPr>
+        <p:blipFill>
+          <a:blip>
+            <a:extLst>
+              <a:ext uri="{96DAC541-7B7A-43D3-8B79-37D633B846F1}">
+                <asvg:svgBlip xmlns:asvg="http://schemas.microsoft.com/office/drawing/2016/SVG/main" r:embed="rId2"/>
+              </a:ext>
+            </a:extLst>
+          </a:blip>
+          <a:stretch>
+            <a:fillRect/>
+          </a:stretch>
+        </p:blipFill>
+        <p:spPr>
+          <a:xfrm>
+            <a:off x="3964417" y="3202808"/>
+            <a:ext cx="489169" cy="489169"/>
+          </a:xfrm>
+          <a:prstGeom prst="rect">
+            <a:avLst/>
+          </a:prstGeom>
+        </p:spPr>
+      </p:pic>
+      <p:sp>
+        <p:nvSpPr>
+          <p:cNvPr id="7" name="テキスト ボックス 6">
+            <a:extLst>
+              <a:ext uri="{FF2B5EF4-FFF2-40B4-BE49-F238E27FC236}">
+                <a16:creationId xmlns:a16="http://schemas.microsoft.com/office/drawing/2014/main" id="{26140F1D-A4A1-EE09-3A50-F04F733F0B37}"/>
+              </a:ext>
+            </a:extLst>
+          </p:cNvPr>
+          <p:cNvSpPr txBox="1"/>
+          <p:nvPr/>
+        </p:nvSpPr>
+        <p:spPr>
+          <a:xfrm>
+            <a:off x="3488292" y="3793777"/>
+            <a:ext cx="1441420" cy="523220"/>
+          </a:xfrm>
+          <a:prstGeom prst="rect">
+            <a:avLst/>
+          </a:prstGeom>
+          <a:noFill/>
+        </p:spPr>
+        <p:txBody>
+          <a:bodyPr wrap="none" rtlCol="0">
+            <a:spAutoFit/>
+          </a:bodyPr>
+          <a:lstStyle/>
+          <a:p>
+            <a:r>
+              <a:rPr kumimoji="1" lang="ja-JP" altLang="en-US" sz="1400" dirty="0"/>
+              <a:t>踏み台サーバー</a:t>
+            </a:r>
+            <a:br>
+              <a:rPr kumimoji="1" lang="en-US" altLang="ja-JP" sz="1400" dirty="0"/>
+            </a:br>
+            <a:r>
+              <a:rPr kumimoji="1" lang="en-US" altLang="ja-JP" sz="1400" dirty="0"/>
+              <a:t>(</a:t>
+            </a:r>
+            <a:r>
+              <a:rPr kumimoji="1" lang="en-US" altLang="ja-JP" sz="1400" dirty="0" err="1"/>
+              <a:t>Jumpbox</a:t>
+            </a:r>
+            <a:r>
+              <a:rPr kumimoji="1" lang="en-US" altLang="ja-JP" sz="1400" dirty="0"/>
+              <a:t> VM)</a:t>
+            </a:r>
+            <a:endParaRPr kumimoji="1" lang="ja-JP" altLang="en-US" sz="1400" dirty="0"/>
+          </a:p>
+        </p:txBody>
+      </p:sp>
+      <p:pic>
+        <p:nvPicPr>
+          <p:cNvPr id="9" name="グラフィックス 8">
+            <a:extLst>
+              <a:ext uri="{FF2B5EF4-FFF2-40B4-BE49-F238E27FC236}">
+                <a16:creationId xmlns:a16="http://schemas.microsoft.com/office/drawing/2014/main" id="{6B972B40-2C8F-215B-99BD-A9C964F710AD}"/>
+              </a:ext>
+            </a:extLst>
+          </p:cNvPr>
+          <p:cNvPicPr>
+            <a:picLocks noChangeAspect="1"/>
+          </p:cNvPicPr>
+          <p:nvPr/>
+        </p:nvPicPr>
+        <p:blipFill>
+          <a:blip>
+            <a:extLst>
+              <a:ext uri="{96DAC541-7B7A-43D3-8B79-37D633B846F1}">
+                <asvg:svgBlip xmlns:asvg="http://schemas.microsoft.com/office/drawing/2016/SVG/main" r:embed="rId3"/>
+              </a:ext>
+            </a:extLst>
+          </a:blip>
+          <a:stretch>
+            <a:fillRect/>
+          </a:stretch>
+        </p:blipFill>
+        <p:spPr>
+          <a:xfrm>
+            <a:off x="891616" y="3157024"/>
+            <a:ext cx="489169" cy="489169"/>
+          </a:xfrm>
+          <a:prstGeom prst="rect">
+            <a:avLst/>
+          </a:prstGeom>
+        </p:spPr>
+      </p:pic>
+      <p:pic>
+        <p:nvPicPr>
+          <p:cNvPr id="13" name="グラフィックス 12">
+            <a:extLst>
+              <a:ext uri="{FF2B5EF4-FFF2-40B4-BE49-F238E27FC236}">
+                <a16:creationId xmlns:a16="http://schemas.microsoft.com/office/drawing/2014/main" id="{4FDFA9A9-19AA-006A-A47A-19FC51E5D374}"/>
+              </a:ext>
+            </a:extLst>
+          </p:cNvPr>
+          <p:cNvPicPr>
+            <a:picLocks noChangeAspect="1"/>
+          </p:cNvPicPr>
+          <p:nvPr/>
+        </p:nvPicPr>
+        <p:blipFill>
+          <a:blip>
+            <a:extLst>
+              <a:ext uri="{96DAC541-7B7A-43D3-8B79-37D633B846F1}">
+                <asvg:svgBlip xmlns:asvg="http://schemas.microsoft.com/office/drawing/2016/SVG/main" r:embed="rId4"/>
+              </a:ext>
+            </a:extLst>
+          </a:blip>
+          <a:stretch>
+            <a:fillRect/>
+          </a:stretch>
+        </p:blipFill>
+        <p:spPr>
+          <a:xfrm>
+            <a:off x="2246326" y="2518356"/>
+            <a:ext cx="404272" cy="404272"/>
+          </a:xfrm>
+          <a:prstGeom prst="rect">
+            <a:avLst/>
+          </a:prstGeom>
+        </p:spPr>
+      </p:pic>
+      <p:sp>
+        <p:nvSpPr>
+          <p:cNvPr id="15" name="テキスト ボックス 14">
+            <a:extLst>
+              <a:ext uri="{FF2B5EF4-FFF2-40B4-BE49-F238E27FC236}">
+                <a16:creationId xmlns:a16="http://schemas.microsoft.com/office/drawing/2014/main" id="{3C04AFB2-1E6C-E65B-47C1-F0B1888DED40}"/>
+              </a:ext>
+            </a:extLst>
+          </p:cNvPr>
+          <p:cNvSpPr txBox="1"/>
+          <p:nvPr/>
+        </p:nvSpPr>
+        <p:spPr>
+          <a:xfrm>
+            <a:off x="2688950" y="2557863"/>
+            <a:ext cx="659155" cy="307777"/>
+          </a:xfrm>
+          <a:prstGeom prst="rect">
+            <a:avLst/>
+          </a:prstGeom>
+          <a:noFill/>
+        </p:spPr>
+        <p:txBody>
+          <a:bodyPr wrap="none" rtlCol="0">
+            <a:spAutoFit/>
+          </a:bodyPr>
+          <a:lstStyle/>
+          <a:p>
+            <a:r>
+              <a:rPr kumimoji="1" lang="en-US" altLang="ja-JP" sz="1400" dirty="0"/>
+              <a:t>VNET</a:t>
+            </a:r>
+            <a:endParaRPr kumimoji="1" lang="ja-JP" altLang="en-US" sz="1400" dirty="0"/>
+          </a:p>
+        </p:txBody>
+      </p:sp>
+      <p:pic>
+        <p:nvPicPr>
+          <p:cNvPr id="17" name="グラフィックス 16">
+            <a:extLst>
+              <a:ext uri="{FF2B5EF4-FFF2-40B4-BE49-F238E27FC236}">
+                <a16:creationId xmlns:a16="http://schemas.microsoft.com/office/drawing/2014/main" id="{946A7ADF-66F1-12A4-074F-38B3AF37349E}"/>
+              </a:ext>
+            </a:extLst>
+          </p:cNvPr>
+          <p:cNvPicPr>
+            <a:picLocks noChangeAspect="1"/>
+          </p:cNvPicPr>
+          <p:nvPr/>
+        </p:nvPicPr>
+        <p:blipFill>
+          <a:blip>
+            <a:extLst>
+              <a:ext uri="{96DAC541-7B7A-43D3-8B79-37D633B846F1}">
+                <asvg:svgBlip xmlns:asvg="http://schemas.microsoft.com/office/drawing/2016/SVG/main" r:embed="rId5"/>
+              </a:ext>
+            </a:extLst>
+          </a:blip>
+          <a:stretch>
+            <a:fillRect/>
+          </a:stretch>
+        </p:blipFill>
+        <p:spPr>
+          <a:xfrm>
+            <a:off x="8031440" y="3202808"/>
+            <a:ext cx="489169" cy="489169"/>
+          </a:xfrm>
+          <a:prstGeom prst="rect">
+            <a:avLst/>
+          </a:prstGeom>
+        </p:spPr>
+      </p:pic>
+      <p:sp>
+        <p:nvSpPr>
+          <p:cNvPr id="19" name="テキスト ボックス 18">
+            <a:extLst>
+              <a:ext uri="{FF2B5EF4-FFF2-40B4-BE49-F238E27FC236}">
+                <a16:creationId xmlns:a16="http://schemas.microsoft.com/office/drawing/2014/main" id="{0B3CF8BE-74BF-D755-729C-2C500EE43BC0}"/>
+              </a:ext>
+            </a:extLst>
+          </p:cNvPr>
+          <p:cNvSpPr txBox="1"/>
+          <p:nvPr/>
+        </p:nvSpPr>
+        <p:spPr>
+          <a:xfrm>
+            <a:off x="7497606" y="3928168"/>
+            <a:ext cx="1556836" cy="307777"/>
+          </a:xfrm>
+          <a:prstGeom prst="rect">
+            <a:avLst/>
+          </a:prstGeom>
+          <a:noFill/>
+        </p:spPr>
+        <p:txBody>
+          <a:bodyPr wrap="none" rtlCol="0">
+            <a:spAutoFit/>
+          </a:bodyPr>
+          <a:lstStyle/>
+          <a:p>
+            <a:r>
+              <a:rPr lang="en-US" altLang="ja-JP" sz="1400" dirty="0"/>
+              <a:t>Private Endpoint</a:t>
+            </a:r>
+            <a:endParaRPr kumimoji="1" lang="ja-JP" altLang="en-US" sz="1400" dirty="0"/>
+          </a:p>
+        </p:txBody>
+      </p:sp>
+      <p:pic>
+        <p:nvPicPr>
+          <p:cNvPr id="20" name="図 19" descr="Aspire — あなたのスタックをシンプルに">
+            <a:extLst>
+              <a:ext uri="{FF2B5EF4-FFF2-40B4-BE49-F238E27FC236}">
+                <a16:creationId xmlns:a16="http://schemas.microsoft.com/office/drawing/2014/main" id="{6B3470CF-7944-F1C9-8375-60E97C7F742F}"/>
+              </a:ext>
+            </a:extLst>
+          </p:cNvPr>
+          <p:cNvPicPr>
+            <a:picLocks noChangeAspect="1"/>
+          </p:cNvPicPr>
+          <p:nvPr/>
+        </p:nvPicPr>
+        <p:blipFill>
+          <a:blip r:embed="rId6"/>
+          <a:stretch>
+            <a:fillRect/>
+          </a:stretch>
+        </p:blipFill>
+        <p:spPr>
+          <a:xfrm>
+            <a:off x="10546307" y="3071816"/>
+            <a:ext cx="751153" cy="751153"/>
+          </a:xfrm>
+          <a:prstGeom prst="rect">
+            <a:avLst/>
+          </a:prstGeom>
+        </p:spPr>
+      </p:pic>
+      <p:cxnSp>
+        <p:nvCxnSpPr>
+          <p:cNvPr id="23" name="直線矢印コネクタ 22">
+            <a:extLst>
+              <a:ext uri="{FF2B5EF4-FFF2-40B4-BE49-F238E27FC236}">
+                <a16:creationId xmlns:a16="http://schemas.microsoft.com/office/drawing/2014/main" id="{59F92DF6-1AF1-8C81-B61D-39149FA54ED6}"/>
+              </a:ext>
+            </a:extLst>
+          </p:cNvPr>
+          <p:cNvCxnSpPr/>
+          <p:nvPr/>
+        </p:nvCxnSpPr>
+        <p:spPr>
+          <a:xfrm>
+            <a:off x="8712553" y="3481984"/>
+            <a:ext cx="1821694" cy="0"/>
+          </a:xfrm>
+          <a:prstGeom prst="straightConnector1">
+            <a:avLst/>
+          </a:prstGeom>
+          <a:ln>
+            <a:solidFill>
+              <a:schemeClr val="bg2">
+                <a:lumMod val="10000"/>
+              </a:schemeClr>
+            </a:solidFill>
+            <a:prstDash val="dash"/>
+            <a:headEnd type="none" w="med" len="med"/>
+            <a:tailEnd type="arrow" w="med" len="med"/>
+          </a:ln>
+        </p:spPr>
+        <p:style>
+          <a:lnRef idx="2">
+            <a:schemeClr val="accent3"/>
+          </a:lnRef>
+          <a:fillRef idx="0">
+            <a:schemeClr val="accent3"/>
+          </a:fillRef>
+          <a:effectRef idx="1">
+            <a:schemeClr val="accent3"/>
+          </a:effectRef>
+          <a:fontRef idx="minor">
+            <a:schemeClr val="tx1"/>
+          </a:fontRef>
+        </p:style>
+      </p:cxnSp>
+      <p:cxnSp>
+        <p:nvCxnSpPr>
+          <p:cNvPr id="24" name="直線矢印コネクタ 23">
+            <a:extLst>
+              <a:ext uri="{FF2B5EF4-FFF2-40B4-BE49-F238E27FC236}">
+                <a16:creationId xmlns:a16="http://schemas.microsoft.com/office/drawing/2014/main" id="{BB4C8A87-B026-CB5B-561D-A33E9A5B9A95}"/>
+              </a:ext>
+            </a:extLst>
+          </p:cNvPr>
+          <p:cNvCxnSpPr/>
+          <p:nvPr/>
+        </p:nvCxnSpPr>
+        <p:spPr>
+          <a:xfrm>
+            <a:off x="1473048" y="3489046"/>
+            <a:ext cx="2204249" cy="0"/>
+          </a:xfrm>
+          <a:prstGeom prst="straightConnector1">
+            <a:avLst/>
+          </a:prstGeom>
+          <a:ln>
+            <a:solidFill>
+              <a:schemeClr val="bg2">
+                <a:lumMod val="10000"/>
+              </a:schemeClr>
+            </a:solidFill>
+            <a:prstDash val="dash"/>
+            <a:headEnd type="none" w="med" len="med"/>
+            <a:tailEnd type="arrow" w="med" len="med"/>
+          </a:ln>
+        </p:spPr>
+        <p:style>
+          <a:lnRef idx="2">
+            <a:schemeClr val="accent3"/>
+          </a:lnRef>
+          <a:fillRef idx="0">
+            <a:schemeClr val="accent3"/>
+          </a:fillRef>
+          <a:effectRef idx="1">
+            <a:schemeClr val="accent3"/>
+          </a:effectRef>
+          <a:fontRef idx="minor">
+            <a:schemeClr val="tx1"/>
+          </a:fontRef>
+        </p:style>
+      </p:cxnSp>
+      <p:sp>
+        <p:nvSpPr>
+          <p:cNvPr id="26" name="テキスト ボックス 25">
+            <a:extLst>
+              <a:ext uri="{FF2B5EF4-FFF2-40B4-BE49-F238E27FC236}">
+                <a16:creationId xmlns:a16="http://schemas.microsoft.com/office/drawing/2014/main" id="{87581E5D-1298-EC85-9060-305E302E56F0}"/>
+              </a:ext>
+            </a:extLst>
+          </p:cNvPr>
+          <p:cNvSpPr txBox="1"/>
+          <p:nvPr/>
+        </p:nvSpPr>
+        <p:spPr>
+          <a:xfrm>
+            <a:off x="729678" y="3777186"/>
+            <a:ext cx="813043" cy="307777"/>
+          </a:xfrm>
+          <a:prstGeom prst="rect">
+            <a:avLst/>
+          </a:prstGeom>
+          <a:noFill/>
+        </p:spPr>
+        <p:txBody>
+          <a:bodyPr wrap="none" rtlCol="0">
+            <a:spAutoFit/>
+          </a:bodyPr>
+          <a:lstStyle/>
+          <a:p>
+            <a:r>
+              <a:rPr lang="en-US" altLang="ja-JP" sz="1400" dirty="0"/>
+              <a:t>Bastion</a:t>
+            </a:r>
+            <a:endParaRPr kumimoji="1" lang="ja-JP" altLang="en-US" sz="1400" dirty="0"/>
+          </a:p>
+        </p:txBody>
+      </p:sp>
+      <p:sp>
+        <p:nvSpPr>
+          <p:cNvPr id="28" name="テキスト ボックス 27">
+            <a:extLst>
+              <a:ext uri="{FF2B5EF4-FFF2-40B4-BE49-F238E27FC236}">
+                <a16:creationId xmlns:a16="http://schemas.microsoft.com/office/drawing/2014/main" id="{34D18711-EBD4-B14D-F333-AE6B83836CA4}"/>
+              </a:ext>
+            </a:extLst>
+          </p:cNvPr>
+          <p:cNvSpPr txBox="1"/>
+          <p:nvPr/>
+        </p:nvSpPr>
+        <p:spPr>
+          <a:xfrm>
+            <a:off x="2516532" y="3188062"/>
+            <a:ext cx="1000595" cy="307777"/>
+          </a:xfrm>
+          <a:prstGeom prst="rect">
+            <a:avLst/>
+          </a:prstGeom>
+          <a:noFill/>
+        </p:spPr>
+        <p:txBody>
+          <a:bodyPr wrap="none" rtlCol="0">
+            <a:spAutoFit/>
+          </a:bodyPr>
+          <a:lstStyle/>
+          <a:p>
+            <a:r>
+              <a:rPr kumimoji="1" lang="en-US" altLang="ja-JP" sz="1400" dirty="0"/>
+              <a:t>RDP/SSH</a:t>
+            </a:r>
+            <a:endParaRPr kumimoji="1" lang="ja-JP" altLang="en-US" sz="1400" dirty="0"/>
+          </a:p>
+        </p:txBody>
+      </p:sp>
+      <p:sp>
+        <p:nvSpPr>
+          <p:cNvPr id="32" name="テキスト ボックス 31">
+            <a:extLst>
+              <a:ext uri="{FF2B5EF4-FFF2-40B4-BE49-F238E27FC236}">
+                <a16:creationId xmlns:a16="http://schemas.microsoft.com/office/drawing/2014/main" id="{D66B16FF-B159-8E66-30B8-565DA0E79903}"/>
+              </a:ext>
+            </a:extLst>
+          </p:cNvPr>
+          <p:cNvSpPr txBox="1"/>
+          <p:nvPr/>
+        </p:nvSpPr>
+        <p:spPr>
+          <a:xfrm>
+            <a:off x="9233912" y="3188061"/>
+            <a:ext cx="1172116" cy="307777"/>
+          </a:xfrm>
+          <a:prstGeom prst="rect">
+            <a:avLst/>
+          </a:prstGeom>
+          <a:noFill/>
+        </p:spPr>
+        <p:txBody>
+          <a:bodyPr wrap="none" rtlCol="0">
+            <a:spAutoFit/>
+          </a:bodyPr>
+          <a:lstStyle/>
+          <a:p>
+            <a:r>
+              <a:rPr lang="en-US" altLang="ja-JP" sz="1400" dirty="0"/>
+              <a:t>Private Link</a:t>
+            </a:r>
+            <a:endParaRPr kumimoji="1" lang="ja-JP" altLang="en-US" sz="1400" dirty="0"/>
+          </a:p>
+        </p:txBody>
+      </p:sp>
+      <p:sp>
+        <p:nvSpPr>
+          <p:cNvPr id="34" name="テキスト ボックス 33">
+            <a:extLst>
+              <a:ext uri="{FF2B5EF4-FFF2-40B4-BE49-F238E27FC236}">
+                <a16:creationId xmlns:a16="http://schemas.microsoft.com/office/drawing/2014/main" id="{2F713869-36D8-0C0F-50E6-524CF4AC615C}"/>
+              </a:ext>
+            </a:extLst>
+          </p:cNvPr>
+          <p:cNvSpPr txBox="1"/>
+          <p:nvPr/>
+        </p:nvSpPr>
+        <p:spPr>
+          <a:xfrm>
+            <a:off x="9966380" y="3976857"/>
+            <a:ext cx="1701107" cy="307777"/>
+          </a:xfrm>
+          <a:prstGeom prst="rect">
+            <a:avLst/>
+          </a:prstGeom>
+          <a:noFill/>
+        </p:spPr>
+        <p:txBody>
+          <a:bodyPr wrap="none" rtlCol="0">
+            <a:spAutoFit/>
+          </a:bodyPr>
+          <a:lstStyle/>
+          <a:p>
+            <a:r>
+              <a:rPr lang="en-US" altLang="ja-JP" sz="1400" dirty="0"/>
+              <a:t>Microsoft Foundry</a:t>
+            </a:r>
+            <a:endParaRPr kumimoji="1" lang="ja-JP" altLang="en-US" sz="1400" dirty="0"/>
+          </a:p>
+        </p:txBody>
+      </p:sp>
+      <p:pic>
+        <p:nvPicPr>
+          <p:cNvPr id="36" name="図 35">
+            <a:extLst>
+              <a:ext uri="{FF2B5EF4-FFF2-40B4-BE49-F238E27FC236}">
+                <a16:creationId xmlns:a16="http://schemas.microsoft.com/office/drawing/2014/main" id="{20109552-377D-AA1C-736E-BE4E094EE62C}"/>
+              </a:ext>
+            </a:extLst>
+          </p:cNvPr>
+          <p:cNvPicPr>
+            <a:picLocks noChangeAspect="1"/>
+          </p:cNvPicPr>
+          <p:nvPr/>
+        </p:nvPicPr>
+        <p:blipFill>
+          <a:blip r:embed="rId7">
+            <a:extLst>
+              <a:ext uri="{28A0092B-C50C-407E-A947-70E740481C1C}">
+                <a14:useLocalDpi xmlns:a14="http://schemas.microsoft.com/office/drawing/2010/main" val="0"/>
+              </a:ext>
+            </a:extLst>
+          </a:blip>
+          <a:stretch>
+            <a:fillRect/>
+          </a:stretch>
+        </p:blipFill>
+        <p:spPr>
+          <a:xfrm>
+            <a:off x="5646595" y="882673"/>
+            <a:ext cx="640814" cy="653892"/>
+          </a:xfrm>
+          <a:prstGeom prst="rect">
+            <a:avLst/>
+          </a:prstGeom>
+        </p:spPr>
+      </p:pic>
+      <p:cxnSp>
+        <p:nvCxnSpPr>
+          <p:cNvPr id="37" name="直線矢印コネクタ 36">
+            <a:extLst>
+              <a:ext uri="{FF2B5EF4-FFF2-40B4-BE49-F238E27FC236}">
+                <a16:creationId xmlns:a16="http://schemas.microsoft.com/office/drawing/2014/main" id="{B2BA3969-2315-7435-341B-5C1C308D8E28}"/>
+              </a:ext>
+            </a:extLst>
+          </p:cNvPr>
+          <p:cNvCxnSpPr>
+            <a:cxnSpLocks/>
+          </p:cNvCxnSpPr>
+          <p:nvPr/>
+        </p:nvCxnSpPr>
+        <p:spPr>
+          <a:xfrm flipV="1">
+            <a:off x="4432444" y="1327736"/>
+            <a:ext cx="1131293" cy="437702"/>
+          </a:xfrm>
+          <a:prstGeom prst="straightConnector1">
+            <a:avLst/>
+          </a:prstGeom>
+          <a:ln>
+            <a:solidFill>
+              <a:schemeClr val="accent2"/>
+            </a:solidFill>
+            <a:headEnd type="none" w="med" len="med"/>
+            <a:tailEnd type="arrow" w="med" len="med"/>
+          </a:ln>
+        </p:spPr>
+        <p:style>
+          <a:lnRef idx="2">
+            <a:schemeClr val="accent3"/>
+          </a:lnRef>
+          <a:fillRef idx="0">
+            <a:schemeClr val="accent3"/>
+          </a:fillRef>
+          <a:effectRef idx="1">
+            <a:schemeClr val="accent3"/>
+          </a:effectRef>
+          <a:fontRef idx="minor">
+            <a:schemeClr val="tx1"/>
+          </a:fontRef>
+        </p:style>
+      </p:cxnSp>
+      <p:sp>
+        <p:nvSpPr>
+          <p:cNvPr id="40" name="テキスト ボックス 39">
+            <a:extLst>
+              <a:ext uri="{FF2B5EF4-FFF2-40B4-BE49-F238E27FC236}">
+                <a16:creationId xmlns:a16="http://schemas.microsoft.com/office/drawing/2014/main" id="{C032E53C-3DDB-FB4A-A87E-62D1433BC678}"/>
+              </a:ext>
+            </a:extLst>
+          </p:cNvPr>
+          <p:cNvSpPr txBox="1"/>
+          <p:nvPr/>
+        </p:nvSpPr>
+        <p:spPr>
+          <a:xfrm>
+            <a:off x="6186835" y="964049"/>
+            <a:ext cx="2408032" cy="523220"/>
+          </a:xfrm>
+          <a:prstGeom prst="rect">
+            <a:avLst/>
+          </a:prstGeom>
+          <a:noFill/>
+        </p:spPr>
+        <p:txBody>
+          <a:bodyPr wrap="none" rtlCol="0">
+            <a:spAutoFit/>
+          </a:bodyPr>
+          <a:lstStyle/>
+          <a:p>
+            <a:r>
+              <a:rPr lang="en-US" altLang="ja-JP" sz="1400" dirty="0"/>
+              <a:t>Foundry Portal</a:t>
+            </a:r>
+          </a:p>
+          <a:p>
+            <a:r>
+              <a:rPr kumimoji="1" lang="en-US" altLang="ja-JP" sz="1400" dirty="0">
+                <a:hlinkClick r:id="rId8"/>
+              </a:rPr>
+              <a:t>https://services.azure.com</a:t>
+            </a:r>
+            <a:endParaRPr kumimoji="1" lang="ja-JP" altLang="en-US" sz="1400" dirty="0"/>
+          </a:p>
+        </p:txBody>
+      </p:sp>
+      <p:cxnSp>
+        <p:nvCxnSpPr>
+          <p:cNvPr id="2" name="直線矢印コネクタ 1">
+            <a:extLst>
+              <a:ext uri="{FF2B5EF4-FFF2-40B4-BE49-F238E27FC236}">
+                <a16:creationId xmlns:a16="http://schemas.microsoft.com/office/drawing/2014/main" id="{37FC13DF-ABED-0989-465A-DE9422D20864}"/>
+              </a:ext>
+            </a:extLst>
+          </p:cNvPr>
+          <p:cNvCxnSpPr>
+            <a:cxnSpLocks/>
+          </p:cNvCxnSpPr>
+          <p:nvPr/>
+        </p:nvCxnSpPr>
+        <p:spPr>
+          <a:xfrm flipV="1">
+            <a:off x="4209001" y="1982145"/>
+            <a:ext cx="0" cy="1137730"/>
+          </a:xfrm>
+          <a:prstGeom prst="straightConnector1">
+            <a:avLst/>
+          </a:prstGeom>
+          <a:ln>
+            <a:solidFill>
+              <a:schemeClr val="bg2">
+                <a:lumMod val="10000"/>
+              </a:schemeClr>
+            </a:solidFill>
+            <a:prstDash val="dash"/>
+            <a:headEnd type="none" w="med" len="med"/>
+            <a:tailEnd type="arrow" w="med" len="med"/>
+          </a:ln>
+        </p:spPr>
+        <p:style>
+          <a:lnRef idx="2">
+            <a:schemeClr val="accent3"/>
+          </a:lnRef>
+          <a:fillRef idx="0">
+            <a:schemeClr val="accent3"/>
+          </a:fillRef>
+          <a:effectRef idx="1">
+            <a:schemeClr val="accent3"/>
+          </a:effectRef>
+          <a:fontRef idx="minor">
+            <a:schemeClr val="tx1"/>
+          </a:fontRef>
+        </p:style>
+      </p:cxnSp>
+      <p:pic>
+        <p:nvPicPr>
+          <p:cNvPr id="8" name="グラフィックス 7">
+            <a:extLst>
+              <a:ext uri="{FF2B5EF4-FFF2-40B4-BE49-F238E27FC236}">
+                <a16:creationId xmlns:a16="http://schemas.microsoft.com/office/drawing/2014/main" id="{CBC00CB8-74DF-D93A-7A69-61CD38EAFECF}"/>
+              </a:ext>
+            </a:extLst>
+          </p:cNvPr>
+          <p:cNvPicPr>
+            <a:picLocks noChangeAspect="1"/>
+          </p:cNvPicPr>
+          <p:nvPr/>
+        </p:nvPicPr>
+        <p:blipFill>
+          <a:blip>
+            <a:extLst>
+              <a:ext uri="{96DAC541-7B7A-43D3-8B79-37D633B846F1}">
+                <asvg:svgBlip xmlns:asvg="http://schemas.microsoft.com/office/drawing/2016/SVG/main" r:embed="rId9"/>
+              </a:ext>
+            </a:extLst>
+          </a:blip>
+          <a:stretch>
+            <a:fillRect/>
+          </a:stretch>
+        </p:blipFill>
+        <p:spPr>
+          <a:xfrm>
+            <a:off x="4006865" y="1601475"/>
+            <a:ext cx="404272" cy="404272"/>
+          </a:xfrm>
+          <a:prstGeom prst="rect">
+            <a:avLst/>
+          </a:prstGeom>
+        </p:spPr>
+      </p:pic>
+      <p:sp>
+        <p:nvSpPr>
+          <p:cNvPr id="11" name="テキスト ボックス 10">
+            <a:extLst>
+              <a:ext uri="{FF2B5EF4-FFF2-40B4-BE49-F238E27FC236}">
+                <a16:creationId xmlns:a16="http://schemas.microsoft.com/office/drawing/2014/main" id="{052604DD-9EC9-7DD2-F3B4-C7EFCABD9C9B}"/>
+              </a:ext>
+            </a:extLst>
+          </p:cNvPr>
+          <p:cNvSpPr txBox="1"/>
+          <p:nvPr/>
+        </p:nvSpPr>
+        <p:spPr>
+          <a:xfrm>
+            <a:off x="2516670" y="1624229"/>
+            <a:ext cx="1540806" cy="523220"/>
+          </a:xfrm>
+          <a:prstGeom prst="rect">
+            <a:avLst/>
+          </a:prstGeom>
+          <a:noFill/>
+        </p:spPr>
+        <p:txBody>
+          <a:bodyPr wrap="none" rtlCol="0">
+            <a:spAutoFit/>
+          </a:bodyPr>
+          <a:lstStyle/>
+          <a:p>
+            <a:r>
+              <a:rPr kumimoji="1" lang="en-US" altLang="ja-JP" sz="1400" dirty="0"/>
+              <a:t>Public IP</a:t>
+            </a:r>
+            <a:br>
+              <a:rPr kumimoji="1" lang="en-US" altLang="ja-JP" sz="1400" dirty="0"/>
+            </a:br>
+            <a:r>
+              <a:rPr kumimoji="1" lang="en-US" altLang="ja-JP" sz="1400" dirty="0"/>
+              <a:t>or NAT Gateway</a:t>
+            </a:r>
+            <a:endParaRPr kumimoji="1" lang="ja-JP" altLang="en-US" sz="1400" dirty="0"/>
+          </a:p>
+        </p:txBody>
+      </p:sp>
+      <p:cxnSp>
+        <p:nvCxnSpPr>
+          <p:cNvPr id="14" name="コネクタ: カギ線 13">
+            <a:extLst>
+              <a:ext uri="{FF2B5EF4-FFF2-40B4-BE49-F238E27FC236}">
+                <a16:creationId xmlns:a16="http://schemas.microsoft.com/office/drawing/2014/main" id="{D3FBADF7-FBCD-D0B4-420D-69464E455F48}"/>
+              </a:ext>
+            </a:extLst>
+          </p:cNvPr>
+          <p:cNvCxnSpPr>
+            <a:cxnSpLocks/>
+            <a:stCxn id="8" idx="3"/>
+            <a:endCxn id="20" idx="0"/>
+          </p:cNvCxnSpPr>
+          <p:nvPr/>
+        </p:nvCxnSpPr>
+        <p:spPr>
+          <a:xfrm>
+            <a:off x="4411137" y="1803611"/>
+            <a:ext cx="6510747" cy="1268205"/>
+          </a:xfrm>
+          <a:prstGeom prst="bentConnector2">
+            <a:avLst/>
+          </a:prstGeom>
+          <a:ln>
+            <a:solidFill>
+              <a:schemeClr val="accent2"/>
+            </a:solidFill>
+            <a:headEnd type="none" w="med" len="med"/>
+            <a:tailEnd type="arrow" w="med" len="med"/>
+          </a:ln>
+        </p:spPr>
+        <p:style>
+          <a:lnRef idx="2">
+            <a:schemeClr val="accent3"/>
+          </a:lnRef>
+          <a:fillRef idx="0">
+            <a:schemeClr val="accent3"/>
+          </a:fillRef>
+          <a:effectRef idx="1">
+            <a:schemeClr val="accent3"/>
+          </a:effectRef>
+          <a:fontRef idx="minor">
+            <a:schemeClr val="tx1"/>
+          </a:fontRef>
+        </p:style>
+      </p:cxnSp>
+      <p:sp>
+        <p:nvSpPr>
+          <p:cNvPr id="21" name="テキスト ボックス 20">
+            <a:extLst>
+              <a:ext uri="{FF2B5EF4-FFF2-40B4-BE49-F238E27FC236}">
+                <a16:creationId xmlns:a16="http://schemas.microsoft.com/office/drawing/2014/main" id="{BE3BD557-38B3-8B6E-7945-6FFC876E4E5D}"/>
+              </a:ext>
+            </a:extLst>
+          </p:cNvPr>
+          <p:cNvSpPr txBox="1"/>
+          <p:nvPr/>
+        </p:nvSpPr>
+        <p:spPr>
+          <a:xfrm>
+            <a:off x="5767405" y="1845897"/>
+            <a:ext cx="2601994" cy="523220"/>
+          </a:xfrm>
+          <a:prstGeom prst="rect">
+            <a:avLst/>
+          </a:prstGeom>
+          <a:noFill/>
+        </p:spPr>
+        <p:txBody>
+          <a:bodyPr wrap="none" rtlCol="0">
+            <a:spAutoFit/>
+          </a:bodyPr>
+          <a:lstStyle/>
+          <a:p>
+            <a:r>
+              <a:rPr lang="en-US" altLang="ja-JP" sz="1400" dirty="0"/>
+              <a:t>Foundry API</a:t>
+            </a:r>
+          </a:p>
+          <a:p>
+            <a:r>
+              <a:rPr kumimoji="1" lang="en-US" altLang="ja-JP" sz="1400" dirty="0">
+                <a:hlinkClick r:id="rId10"/>
+              </a:rPr>
+              <a:t>https://services.ai.azure.com</a:t>
+            </a:r>
+            <a:endParaRPr kumimoji="1" lang="ja-JP" altLang="en-US" sz="1400" dirty="0"/>
+          </a:p>
+        </p:txBody>
+      </p:sp>
+      <p:sp>
+        <p:nvSpPr>
+          <p:cNvPr id="31" name="テキスト ボックス 30">
+            <a:extLst>
+              <a:ext uri="{FF2B5EF4-FFF2-40B4-BE49-F238E27FC236}">
+                <a16:creationId xmlns:a16="http://schemas.microsoft.com/office/drawing/2014/main" id="{7F7307B2-5806-BB41-41A3-3A2B2BF2232F}"/>
+              </a:ext>
+            </a:extLst>
+          </p:cNvPr>
+          <p:cNvSpPr txBox="1"/>
+          <p:nvPr/>
+        </p:nvSpPr>
+        <p:spPr>
+          <a:xfrm>
+            <a:off x="10037452" y="2299150"/>
+            <a:ext cx="1689886" cy="475655"/>
+          </a:xfrm>
+          <a:prstGeom prst="rect">
+            <a:avLst/>
+          </a:prstGeom>
+        </p:spPr>
+        <p:style>
+          <a:lnRef idx="1">
+            <a:schemeClr val="accent2"/>
+          </a:lnRef>
+          <a:fillRef idx="2">
+            <a:schemeClr val="accent2"/>
+          </a:fillRef>
+          <a:effectRef idx="1">
+            <a:schemeClr val="accent2"/>
+          </a:effectRef>
+          <a:fontRef idx="minor">
+            <a:schemeClr val="dk1"/>
+          </a:fontRef>
+        </p:style>
+        <p:txBody>
+          <a:bodyPr wrap="none" rtlCol="0" anchor="ctr">
+            <a:spAutoFit/>
+          </a:bodyPr>
+          <a:lstStyle/>
+          <a:p>
+            <a:pPr algn="ctr"/>
+            <a:r>
+              <a:rPr lang="ja-JP" altLang="en-US" sz="1400" dirty="0"/>
+              <a:t>踏み台や </a:t>
+            </a:r>
+            <a:r>
+              <a:rPr lang="en-US" altLang="ja-JP" sz="1400" dirty="0"/>
+              <a:t>NAT</a:t>
+            </a:r>
+            <a:r>
+              <a:rPr lang="ja-JP" altLang="en-US" sz="1400" dirty="0"/>
+              <a:t> の</a:t>
+            </a:r>
+            <a:endParaRPr lang="en-US" altLang="ja-JP" sz="1400" dirty="0"/>
+          </a:p>
+          <a:p>
+            <a:pPr algn="ctr"/>
+            <a:r>
+              <a:rPr lang="en-US" altLang="ja-JP" sz="1400" dirty="0"/>
+              <a:t>Public IP</a:t>
+            </a:r>
+            <a:r>
+              <a:rPr lang="ja-JP" altLang="en-US" sz="1400" dirty="0"/>
+              <a:t> のみ許可</a:t>
+            </a:r>
+            <a:endParaRPr kumimoji="1" lang="ja-JP" altLang="en-US" sz="1400" dirty="0"/>
+          </a:p>
+        </p:txBody>
+      </p:sp>
+    </p:spTree>
+    <p:extLst>
+      <p:ext uri="{BB962C8B-B14F-4D97-AF65-F5344CB8AC3E}">
+        <p14:creationId xmlns:p14="http://schemas.microsoft.com/office/powerpoint/2010/main" val="2176524991"/>
+      </p:ext>
+    </p:extLst>
+  </p:cSld>
+  <p:clrMapOvr>
+    <a:masterClrMapping/>
+  </p:clrMapOvr>
+</p:sld>
+</file>
+
+<file path=ppt/slides/slide7.xml><?xml version="1.0" encoding="utf-8"?>
+<p:sld xmlns:a="http://schemas.openxmlformats.org/drawingml/2006/main" xmlns:r="http://schemas.openxmlformats.org/officeDocument/2006/relationships" xmlns:p="http://schemas.openxmlformats.org/presentationml/2006/main">
+  <p:cSld>
+    <p:spTree>
+      <p:nvGrpSpPr>
+        <p:cNvPr id="1" name=""/>
+        <p:cNvGrpSpPr/>
+        <p:nvPr/>
+      </p:nvGrpSpPr>
+      <p:grpSpPr>
+        <a:xfrm>
+          <a:off x="0" y="0"/>
+          <a:ext cx="0" cy="0"/>
+          <a:chOff x="0" y="0"/>
+          <a:chExt cx="0" cy="0"/>
+        </a:xfrm>
+      </p:grpSpPr>
+    </p:spTree>
+    <p:extLst>
+      <p:ext uri="{BB962C8B-B14F-4D97-AF65-F5344CB8AC3E}">
+        <p14:creationId xmlns:p14="http://schemas.microsoft.com/office/powerpoint/2010/main" val="2768797739"/>
       </p:ext>
     </p:extLst>
   </p:cSld>
